--- a/Adobe_Assessment_Presentation.pptx
+++ b/Adobe_Assessment_Presentation.pptx
@@ -16,6 +16,11 @@
     <p:sldId id="264" r:id="rId10"/>
     <p:sldId id="265" r:id="rId11"/>
     <p:sldId id="266" r:id="rId12"/>
+    <p:sldId id="267" r:id="rId18"/>
+    <p:sldId id="268" r:id="rId19"/>
+    <p:sldId id="269" r:id="rId20"/>
+    <p:sldId id="270" r:id="rId21"/>
+    <p:sldId id="271" r:id="rId22"/>
   </p:sldIdLst>
   <p:notesMasterIdLst>
     <p:notesMasterId r:id="rId13"/>
@@ -3101,6 +3106,6524 @@
 </p:sld>
 </file>
 
+<file path=ppt/slides/slide12.xml><?xml version="1.0" encoding="utf-8"?>
+<p:sld xmlns:a="http://schemas.openxmlformats.org/drawingml/2006/main" xmlns:p="http://schemas.openxmlformats.org/presentationml/2006/main" xmlns:r="http://schemas.openxmlformats.org/officeDocument/2006/relationships">
+  <p:cSld>
+    <p:spTree>
+      <p:nvGrpSpPr>
+        <p:cNvPr id="1" name=""/>
+        <p:cNvGrpSpPr/>
+        <p:nvPr/>
+      </p:nvGrpSpPr>
+      <p:grpSpPr/>
+      <p:sp>
+        <p:nvSpPr>
+          <p:cNvPr id="2" name="Rectangle 1"/>
+          <p:cNvSpPr/>
+          <p:nvPr/>
+        </p:nvSpPr>
+        <p:spPr>
+          <a:xfrm>
+            <a:off x="0" y="0"/>
+            <a:ext cx="9144000" cy="1005840"/>
+          </a:xfrm>
+          <a:prstGeom prst="rect">
+            <a:avLst/>
+          </a:prstGeom>
+          <a:solidFill>
+            <a:srgbClr val="EB1C24"/>
+          </a:solidFill>
+          <a:ln>
+            <a:noFill/>
+          </a:ln>
+        </p:spPr>
+        <p:style>
+          <a:lnRef idx="1">
+            <a:schemeClr val="accent1"/>
+          </a:lnRef>
+          <a:fillRef idx="3">
+            <a:schemeClr val="accent1"/>
+          </a:fillRef>
+          <a:effectRef idx="2">
+            <a:schemeClr val="accent1"/>
+          </a:effectRef>
+          <a:fontRef idx="minor">
+            <a:schemeClr val="lt1"/>
+          </a:fontRef>
+        </p:style>
+        <p:txBody>
+          <a:bodyPr rtlCol="0" anchor="ctr"/>
+          <a:lstStyle/>
+          <a:p>
+            <a:pPr algn="ctr"/>
+          </a:p>
+        </p:txBody>
+      </p:sp>
+      <p:sp>
+        <p:nvSpPr>
+          <p:cNvPr id="3" name="TextBox 2"/>
+          <p:cNvSpPr txBox="1"/>
+          <p:nvPr/>
+        </p:nvSpPr>
+        <p:spPr>
+          <a:xfrm>
+            <a:off x="274320" y="182880"/>
+            <a:ext cx="8595360" cy="731520"/>
+          </a:xfrm>
+          <a:prstGeom prst="rect">
+            <a:avLst/>
+          </a:prstGeom>
+          <a:noFill/>
+        </p:spPr>
+        <p:txBody>
+          <a:bodyPr wrap="square">
+            <a:spAutoFit/>
+          </a:bodyPr>
+          <a:lstStyle/>
+          <a:p>
+            <a:pPr algn="l"/>
+            <a:r>
+              <a:rPr sz="2400" b="1">
+                <a:solidFill>
+                  <a:srgbClr val="FFFFFF"/>
+                </a:solidFill>
+              </a:rPr>
+              <a:t>GitHub Actions CI/CD Pipeline</a:t>
+            </a:r>
+          </a:p>
+        </p:txBody>
+      </p:sp>
+      <p:sp>
+        <p:nvSpPr>
+          <p:cNvPr id="4" name="Rectangle 3"/>
+          <p:cNvSpPr/>
+          <p:nvPr/>
+        </p:nvSpPr>
+        <p:spPr>
+          <a:xfrm>
+            <a:off x="0" y="6309360"/>
+            <a:ext cx="9144000" cy="548640"/>
+          </a:xfrm>
+          <a:prstGeom prst="rect">
+            <a:avLst/>
+          </a:prstGeom>
+          <a:solidFill>
+            <a:srgbClr val="3C3C3C"/>
+          </a:solidFill>
+          <a:ln>
+            <a:noFill/>
+          </a:ln>
+        </p:spPr>
+        <p:style>
+          <a:lnRef idx="1">
+            <a:schemeClr val="accent1"/>
+          </a:lnRef>
+          <a:fillRef idx="3">
+            <a:schemeClr val="accent1"/>
+          </a:fillRef>
+          <a:effectRef idx="2">
+            <a:schemeClr val="accent1"/>
+          </a:effectRef>
+          <a:fontRef idx="minor">
+            <a:schemeClr val="lt1"/>
+          </a:fontRef>
+        </p:style>
+        <p:txBody>
+          <a:bodyPr rtlCol="0" anchor="ctr"/>
+          <a:lstStyle/>
+          <a:p>
+            <a:pPr algn="ctr"/>
+          </a:p>
+        </p:txBody>
+      </p:sp>
+      <p:sp>
+        <p:nvSpPr>
+          <p:cNvPr id="5" name="TextBox 4"/>
+          <p:cNvSpPr txBox="1"/>
+          <p:nvPr/>
+        </p:nvSpPr>
+        <p:spPr>
+          <a:xfrm>
+            <a:off x="274320" y="6355080"/>
+            <a:ext cx="8595360" cy="365760"/>
+          </a:xfrm>
+          <a:prstGeom prst="rect">
+            <a:avLst/>
+          </a:prstGeom>
+          <a:noFill/>
+        </p:spPr>
+        <p:txBody>
+          <a:bodyPr wrap="square">
+            <a:spAutoFit/>
+          </a:bodyPr>
+          <a:lstStyle/>
+          <a:p>
+            <a:pPr algn="ctr"/>
+            <a:r>
+              <a:rPr sz="900" b="0">
+                <a:solidFill>
+                  <a:srgbClr val="FFFFFF"/>
+                </a:solidFill>
+              </a:rPr>
+              <a:t>Adobe Data Engineer Assessment  |  Search Keyword Performance Analyzer  |  CI/CD</a:t>
+            </a:r>
+          </a:p>
+        </p:txBody>
+      </p:sp>
+      <p:sp>
+        <p:nvSpPr>
+          <p:cNvPr id="6" name="Rectangle 5"/>
+          <p:cNvSpPr/>
+          <p:nvPr/>
+        </p:nvSpPr>
+        <p:spPr>
+          <a:xfrm>
+            <a:off x="365760" y="1188720"/>
+            <a:ext cx="1645920" cy="640080"/>
+          </a:xfrm>
+          <a:prstGeom prst="rect">
+            <a:avLst/>
+          </a:prstGeom>
+          <a:solidFill>
+            <a:srgbClr val="107C10"/>
+          </a:solidFill>
+          <a:ln>
+            <a:noFill/>
+          </a:ln>
+        </p:spPr>
+        <p:style>
+          <a:lnRef idx="1">
+            <a:schemeClr val="accent1"/>
+          </a:lnRef>
+          <a:fillRef idx="3">
+            <a:schemeClr val="accent1"/>
+          </a:fillRef>
+          <a:effectRef idx="2">
+            <a:schemeClr val="accent1"/>
+          </a:effectRef>
+          <a:fontRef idx="minor">
+            <a:schemeClr val="lt1"/>
+          </a:fontRef>
+        </p:style>
+        <p:txBody>
+          <a:bodyPr rtlCol="0" anchor="ctr" wrap="square"/>
+          <a:lstStyle/>
+          <a:p>
+            <a:pPr algn="ctr"/>
+            <a:r>
+              <a:rPr sz="900" b="1">
+                <a:solidFill>
+                  <a:srgbClr val="FFFFFF"/>
+                </a:solidFill>
+              </a:rPr>
+              <a:t>PUSH / PR
+Manual Trigger</a:t>
+            </a:r>
+          </a:p>
+        </p:txBody>
+      </p:sp>
+      <p:sp>
+        <p:nvSpPr>
+          <p:cNvPr id="7" name="Rectangle 6"/>
+          <p:cNvSpPr/>
+          <p:nvPr/>
+        </p:nvSpPr>
+        <p:spPr>
+          <a:xfrm>
+            <a:off x="2194560" y="1188720"/>
+            <a:ext cx="1645920" cy="640080"/>
+          </a:xfrm>
+          <a:prstGeom prst="rect">
+            <a:avLst/>
+          </a:prstGeom>
+          <a:solidFill>
+            <a:srgbClr val="006EC7"/>
+          </a:solidFill>
+          <a:ln>
+            <a:noFill/>
+          </a:ln>
+        </p:spPr>
+        <p:style>
+          <a:lnRef idx="1">
+            <a:schemeClr val="accent1"/>
+          </a:lnRef>
+          <a:fillRef idx="3">
+            <a:schemeClr val="accent1"/>
+          </a:fillRef>
+          <a:effectRef idx="2">
+            <a:schemeClr val="accent1"/>
+          </a:effectRef>
+          <a:fontRef idx="minor">
+            <a:schemeClr val="lt1"/>
+          </a:fontRef>
+        </p:style>
+        <p:txBody>
+          <a:bodyPr rtlCol="0" anchor="ctr" wrap="square"/>
+          <a:lstStyle/>
+          <a:p>
+            <a:pPr algn="ctr"/>
+            <a:r>
+              <a:rPr sz="900" b="1">
+                <a:solidFill>
+                  <a:srgbClr val="FFFFFF"/>
+                </a:solidFill>
+              </a:rPr>
+              <a:t>Unit Tests
+(python unittest)</a:t>
+            </a:r>
+          </a:p>
+        </p:txBody>
+      </p:sp>
+      <p:sp>
+        <p:nvSpPr>
+          <p:cNvPr id="8" name="Rectangle 7"/>
+          <p:cNvSpPr/>
+          <p:nvPr/>
+        </p:nvSpPr>
+        <p:spPr>
+          <a:xfrm>
+            <a:off x="4023360" y="1188720"/>
+            <a:ext cx="1645920" cy="640080"/>
+          </a:xfrm>
+          <a:prstGeom prst="rect">
+            <a:avLst/>
+          </a:prstGeom>
+          <a:solidFill>
+            <a:srgbClr val="006EC7"/>
+          </a:solidFill>
+          <a:ln>
+            <a:noFill/>
+          </a:ln>
+        </p:spPr>
+        <p:style>
+          <a:lnRef idx="1">
+            <a:schemeClr val="accent1"/>
+          </a:lnRef>
+          <a:fillRef idx="3">
+            <a:schemeClr val="accent1"/>
+          </a:fillRef>
+          <a:effectRef idx="2">
+            <a:schemeClr val="accent1"/>
+          </a:effectRef>
+          <a:fontRef idx="minor">
+            <a:schemeClr val="lt1"/>
+          </a:fontRef>
+        </p:style>
+        <p:txBody>
+          <a:bodyPr rtlCol="0" anchor="ctr" wrap="square"/>
+          <a:lstStyle/>
+          <a:p>
+            <a:pPr algn="ctr"/>
+            <a:r>
+              <a:rPr sz="900" b="1">
+                <a:solidFill>
+                  <a:srgbClr val="FFFFFF"/>
+                </a:solidFill>
+              </a:rPr>
+              <a:t>Package Lambda
+(zip + artifact)</a:t>
+            </a:r>
+          </a:p>
+        </p:txBody>
+      </p:sp>
+      <p:sp>
+        <p:nvSpPr>
+          <p:cNvPr id="9" name="Rectangle 8"/>
+          <p:cNvSpPr/>
+          <p:nvPr/>
+        </p:nvSpPr>
+        <p:spPr>
+          <a:xfrm>
+            <a:off x="5852160" y="1188720"/>
+            <a:ext cx="1645920" cy="640080"/>
+          </a:xfrm>
+          <a:prstGeom prst="rect">
+            <a:avLst/>
+          </a:prstGeom>
+          <a:solidFill>
+            <a:srgbClr val="EB1C24"/>
+          </a:solidFill>
+          <a:ln>
+            <a:noFill/>
+          </a:ln>
+        </p:spPr>
+        <p:style>
+          <a:lnRef idx="1">
+            <a:schemeClr val="accent1"/>
+          </a:lnRef>
+          <a:fillRef idx="3">
+            <a:schemeClr val="accent1"/>
+          </a:fillRef>
+          <a:effectRef idx="2">
+            <a:schemeClr val="accent1"/>
+          </a:effectRef>
+          <a:fontRef idx="minor">
+            <a:schemeClr val="lt1"/>
+          </a:fontRef>
+        </p:style>
+        <p:txBody>
+          <a:bodyPr rtlCol="0" anchor="ctr" wrap="square"/>
+          <a:lstStyle/>
+          <a:p>
+            <a:pPr algn="ctr"/>
+            <a:r>
+              <a:rPr sz="900" b="1">
+                <a:solidFill>
+                  <a:srgbClr val="FFFFFF"/>
+                </a:solidFill>
+              </a:rPr>
+              <a:t>Terraform Apply
+(push to main only)</a:t>
+            </a:r>
+          </a:p>
+        </p:txBody>
+      </p:sp>
+      <p:sp>
+        <p:nvSpPr>
+          <p:cNvPr id="10" name="Rectangle 9"/>
+          <p:cNvSpPr/>
+          <p:nvPr/>
+        </p:nvSpPr>
+        <p:spPr>
+          <a:xfrm>
+            <a:off x="5852160" y="2194560"/>
+            <a:ext cx="1645920" cy="640080"/>
+          </a:xfrm>
+          <a:prstGeom prst="rect">
+            <a:avLst/>
+          </a:prstGeom>
+          <a:solidFill>
+            <a:srgbClr val="3C3C3C"/>
+          </a:solidFill>
+          <a:ln>
+            <a:noFill/>
+          </a:ln>
+        </p:spPr>
+        <p:style>
+          <a:lnRef idx="1">
+            <a:schemeClr val="accent1"/>
+          </a:lnRef>
+          <a:fillRef idx="3">
+            <a:schemeClr val="accent1"/>
+          </a:fillRef>
+          <a:effectRef idx="2">
+            <a:schemeClr val="accent1"/>
+          </a:effectRef>
+          <a:fontRef idx="minor">
+            <a:schemeClr val="lt1"/>
+          </a:fontRef>
+        </p:style>
+        <p:txBody>
+          <a:bodyPr rtlCol="0" anchor="ctr" wrap="square"/>
+          <a:lstStyle/>
+          <a:p>
+            <a:pPr algn="ctr"/>
+            <a:r>
+              <a:rPr sz="900" b="1">
+                <a:solidFill>
+                  <a:srgbClr val="FFFFFF"/>
+                </a:solidFill>
+              </a:rPr>
+              <a:t>Terraform Plan
+(PR comment only)</a:t>
+            </a:r>
+          </a:p>
+        </p:txBody>
+      </p:sp>
+      <p:sp>
+        <p:nvSpPr>
+          <p:cNvPr id="11" name="TextBox 10"/>
+          <p:cNvSpPr txBox="1"/>
+          <p:nvPr/>
+        </p:nvSpPr>
+        <p:spPr>
+          <a:xfrm>
+            <a:off x="2057400" y="1417320"/>
+            <a:ext cx="182880" cy="274320"/>
+          </a:xfrm>
+          <a:prstGeom prst="rect">
+            <a:avLst/>
+          </a:prstGeom>
+          <a:noFill/>
+        </p:spPr>
+        <p:txBody>
+          <a:bodyPr wrap="square">
+            <a:spAutoFit/>
+          </a:bodyPr>
+          <a:lstStyle/>
+          <a:p>
+            <a:pPr algn="l"/>
+            <a:r>
+              <a:rPr sz="1400" b="1">
+                <a:solidFill>
+                  <a:srgbClr val="3C3C3C"/>
+                </a:solidFill>
+              </a:rPr>
+              <a:t>▶</a:t>
+            </a:r>
+          </a:p>
+        </p:txBody>
+      </p:sp>
+      <p:sp>
+        <p:nvSpPr>
+          <p:cNvPr id="12" name="TextBox 11"/>
+          <p:cNvSpPr txBox="1"/>
+          <p:nvPr/>
+        </p:nvSpPr>
+        <p:spPr>
+          <a:xfrm>
+            <a:off x="3886200" y="1417320"/>
+            <a:ext cx="182880" cy="274320"/>
+          </a:xfrm>
+          <a:prstGeom prst="rect">
+            <a:avLst/>
+          </a:prstGeom>
+          <a:noFill/>
+        </p:spPr>
+        <p:txBody>
+          <a:bodyPr wrap="square">
+            <a:spAutoFit/>
+          </a:bodyPr>
+          <a:lstStyle/>
+          <a:p>
+            <a:pPr algn="l"/>
+            <a:r>
+              <a:rPr sz="1400" b="1">
+                <a:solidFill>
+                  <a:srgbClr val="3C3C3C"/>
+                </a:solidFill>
+              </a:rPr>
+              <a:t>▶</a:t>
+            </a:r>
+          </a:p>
+        </p:txBody>
+      </p:sp>
+      <p:sp>
+        <p:nvSpPr>
+          <p:cNvPr id="13" name="TextBox 12"/>
+          <p:cNvSpPr txBox="1"/>
+          <p:nvPr/>
+        </p:nvSpPr>
+        <p:spPr>
+          <a:xfrm>
+            <a:off x="5715000" y="1417320"/>
+            <a:ext cx="914400" cy="274320"/>
+          </a:xfrm>
+          <a:prstGeom prst="rect">
+            <a:avLst/>
+          </a:prstGeom>
+          <a:noFill/>
+        </p:spPr>
+        <p:txBody>
+          <a:bodyPr wrap="square">
+            <a:spAutoFit/>
+          </a:bodyPr>
+          <a:lstStyle/>
+          <a:p>
+            <a:pPr algn="l"/>
+            <a:r>
+              <a:rPr sz="900" b="0">
+                <a:solidFill>
+                  <a:srgbClr val="3C3C3C"/>
+                </a:solidFill>
+              </a:rPr>
+              <a:t>▶  (push)</a:t>
+            </a:r>
+          </a:p>
+        </p:txBody>
+      </p:sp>
+      <p:sp>
+        <p:nvSpPr>
+          <p:cNvPr id="14" name="TextBox 13"/>
+          <p:cNvSpPr txBox="1"/>
+          <p:nvPr/>
+        </p:nvSpPr>
+        <p:spPr>
+          <a:xfrm>
+            <a:off x="5715000" y="2331720"/>
+            <a:ext cx="914400" cy="274320"/>
+          </a:xfrm>
+          <a:prstGeom prst="rect">
+            <a:avLst/>
+          </a:prstGeom>
+          <a:noFill/>
+        </p:spPr>
+        <p:txBody>
+          <a:bodyPr wrap="square">
+            <a:spAutoFit/>
+          </a:bodyPr>
+          <a:lstStyle/>
+          <a:p>
+            <a:pPr algn="l"/>
+            <a:r>
+              <a:rPr sz="900" b="0">
+                <a:solidFill>
+                  <a:srgbClr val="3C3C3C"/>
+                </a:solidFill>
+              </a:rPr>
+              <a:t>▶  (PR)</a:t>
+            </a:r>
+          </a:p>
+        </p:txBody>
+      </p:sp>
+      <p:sp>
+        <p:nvSpPr>
+          <p:cNvPr id="15" name="Rectangle 14"/>
+          <p:cNvSpPr/>
+          <p:nvPr/>
+        </p:nvSpPr>
+        <p:spPr>
+          <a:xfrm>
+            <a:off x="365760" y="3017520"/>
+            <a:ext cx="1828800" cy="292608"/>
+          </a:xfrm>
+          <a:prstGeom prst="rect">
+            <a:avLst/>
+          </a:prstGeom>
+          <a:solidFill>
+            <a:srgbClr val="F4F4F4"/>
+          </a:solidFill>
+          <a:ln>
+            <a:solidFill>
+              <a:srgbClr val="3C3C3C"/>
+            </a:solidFill>
+          </a:ln>
+        </p:spPr>
+        <p:style>
+          <a:lnRef idx="1">
+            <a:schemeClr val="accent1"/>
+          </a:lnRef>
+          <a:fillRef idx="3">
+            <a:schemeClr val="accent1"/>
+          </a:fillRef>
+          <a:effectRef idx="2">
+            <a:schemeClr val="accent1"/>
+          </a:effectRef>
+          <a:fontRef idx="minor">
+            <a:schemeClr val="lt1"/>
+          </a:fontRef>
+        </p:style>
+        <p:txBody>
+          <a:bodyPr rtlCol="0" anchor="ctr"/>
+          <a:lstStyle/>
+          <a:p>
+            <a:pPr algn="ctr"/>
+          </a:p>
+        </p:txBody>
+      </p:sp>
+      <p:sp>
+        <p:nvSpPr>
+          <p:cNvPr id="16" name="TextBox 15"/>
+          <p:cNvSpPr txBox="1"/>
+          <p:nvPr/>
+        </p:nvSpPr>
+        <p:spPr>
+          <a:xfrm>
+            <a:off x="411480" y="3054096"/>
+            <a:ext cx="1737360" cy="256032"/>
+          </a:xfrm>
+          <a:prstGeom prst="rect">
+            <a:avLst/>
+          </a:prstGeom>
+          <a:noFill/>
+        </p:spPr>
+        <p:txBody>
+          <a:bodyPr wrap="square">
+            <a:spAutoFit/>
+          </a:bodyPr>
+          <a:lstStyle/>
+          <a:p>
+            <a:pPr algn="l"/>
+            <a:r>
+              <a:rPr sz="900" b="1">
+                <a:solidFill>
+                  <a:srgbClr val="3C3C3C"/>
+                </a:solidFill>
+              </a:rPr>
+              <a:t>Triggers</a:t>
+            </a:r>
+          </a:p>
+        </p:txBody>
+      </p:sp>
+      <p:sp>
+        <p:nvSpPr>
+          <p:cNvPr id="17" name="TextBox 16"/>
+          <p:cNvSpPr txBox="1"/>
+          <p:nvPr/>
+        </p:nvSpPr>
+        <p:spPr>
+          <a:xfrm>
+            <a:off x="2286000" y="3054096"/>
+            <a:ext cx="6400800" cy="256032"/>
+          </a:xfrm>
+          <a:prstGeom prst="rect">
+            <a:avLst/>
+          </a:prstGeom>
+          <a:noFill/>
+        </p:spPr>
+        <p:txBody>
+          <a:bodyPr wrap="square">
+            <a:spAutoFit/>
+          </a:bodyPr>
+          <a:lstStyle/>
+          <a:p>
+            <a:pPr algn="l"/>
+            <a:r>
+              <a:rPr sz="900" b="0">
+                <a:solidFill>
+                  <a:srgbClr val="3C3C3C"/>
+                </a:solidFill>
+              </a:rPr>
+              <a:t>Push to main  |  Pull Request  |  workflow_dispatch (manual)</a:t>
+            </a:r>
+          </a:p>
+        </p:txBody>
+      </p:sp>
+      <p:sp>
+        <p:nvSpPr>
+          <p:cNvPr id="18" name="Rectangle 17"/>
+          <p:cNvSpPr/>
+          <p:nvPr/>
+        </p:nvSpPr>
+        <p:spPr>
+          <a:xfrm>
+            <a:off x="365760" y="3364991"/>
+            <a:ext cx="1828800" cy="292608"/>
+          </a:xfrm>
+          <a:prstGeom prst="rect">
+            <a:avLst/>
+          </a:prstGeom>
+          <a:solidFill>
+            <a:srgbClr val="F4F4F4"/>
+          </a:solidFill>
+          <a:ln>
+            <a:solidFill>
+              <a:srgbClr val="3C3C3C"/>
+            </a:solidFill>
+          </a:ln>
+        </p:spPr>
+        <p:style>
+          <a:lnRef idx="1">
+            <a:schemeClr val="accent1"/>
+          </a:lnRef>
+          <a:fillRef idx="3">
+            <a:schemeClr val="accent1"/>
+          </a:fillRef>
+          <a:effectRef idx="2">
+            <a:schemeClr val="accent1"/>
+          </a:effectRef>
+          <a:fontRef idx="minor">
+            <a:schemeClr val="lt1"/>
+          </a:fontRef>
+        </p:style>
+        <p:txBody>
+          <a:bodyPr rtlCol="0" anchor="ctr"/>
+          <a:lstStyle/>
+          <a:p>
+            <a:pPr algn="ctr"/>
+          </a:p>
+        </p:txBody>
+      </p:sp>
+      <p:sp>
+        <p:nvSpPr>
+          <p:cNvPr id="19" name="TextBox 18"/>
+          <p:cNvSpPr txBox="1"/>
+          <p:nvPr/>
+        </p:nvSpPr>
+        <p:spPr>
+          <a:xfrm>
+            <a:off x="411480" y="3401568"/>
+            <a:ext cx="1737360" cy="256032"/>
+          </a:xfrm>
+          <a:prstGeom prst="rect">
+            <a:avLst/>
+          </a:prstGeom>
+          <a:noFill/>
+        </p:spPr>
+        <p:txBody>
+          <a:bodyPr wrap="square">
+            <a:spAutoFit/>
+          </a:bodyPr>
+          <a:lstStyle/>
+          <a:p>
+            <a:pPr algn="l"/>
+            <a:r>
+              <a:rPr sz="900" b="1">
+                <a:solidFill>
+                  <a:srgbClr val="3C3C3C"/>
+                </a:solidFill>
+              </a:rPr>
+              <a:t>Test Job</a:t>
+            </a:r>
+          </a:p>
+        </p:txBody>
+      </p:sp>
+      <p:sp>
+        <p:nvSpPr>
+          <p:cNvPr id="20" name="TextBox 19"/>
+          <p:cNvSpPr txBox="1"/>
+          <p:nvPr/>
+        </p:nvSpPr>
+        <p:spPr>
+          <a:xfrm>
+            <a:off x="2286000" y="3401568"/>
+            <a:ext cx="6400800" cy="256032"/>
+          </a:xfrm>
+          <a:prstGeom prst="rect">
+            <a:avLst/>
+          </a:prstGeom>
+          <a:noFill/>
+        </p:spPr>
+        <p:txBody>
+          <a:bodyPr wrap="square">
+            <a:spAutoFit/>
+          </a:bodyPr>
+          <a:lstStyle/>
+          <a:p>
+            <a:pPr algn="l"/>
+            <a:r>
+              <a:rPr sz="900" b="0">
+                <a:solidFill>
+                  <a:srgbClr val="3C3C3C"/>
+                </a:solidFill>
+              </a:rPr>
+              <a:t>Runs unittest — no AWS needed. Catches logic errors early.</a:t>
+            </a:r>
+          </a:p>
+        </p:txBody>
+      </p:sp>
+      <p:sp>
+        <p:nvSpPr>
+          <p:cNvPr id="21" name="Rectangle 20"/>
+          <p:cNvSpPr/>
+          <p:nvPr/>
+        </p:nvSpPr>
+        <p:spPr>
+          <a:xfrm>
+            <a:off x="365760" y="3712463"/>
+            <a:ext cx="1828800" cy="292608"/>
+          </a:xfrm>
+          <a:prstGeom prst="rect">
+            <a:avLst/>
+          </a:prstGeom>
+          <a:solidFill>
+            <a:srgbClr val="F4F4F4"/>
+          </a:solidFill>
+          <a:ln>
+            <a:solidFill>
+              <a:srgbClr val="3C3C3C"/>
+            </a:solidFill>
+          </a:ln>
+        </p:spPr>
+        <p:style>
+          <a:lnRef idx="1">
+            <a:schemeClr val="accent1"/>
+          </a:lnRef>
+          <a:fillRef idx="3">
+            <a:schemeClr val="accent1"/>
+          </a:fillRef>
+          <a:effectRef idx="2">
+            <a:schemeClr val="accent1"/>
+          </a:effectRef>
+          <a:fontRef idx="minor">
+            <a:schemeClr val="lt1"/>
+          </a:fontRef>
+        </p:style>
+        <p:txBody>
+          <a:bodyPr rtlCol="0" anchor="ctr"/>
+          <a:lstStyle/>
+          <a:p>
+            <a:pPr algn="ctr"/>
+          </a:p>
+        </p:txBody>
+      </p:sp>
+      <p:sp>
+        <p:nvSpPr>
+          <p:cNvPr id="22" name="TextBox 21"/>
+          <p:cNvSpPr txBox="1"/>
+          <p:nvPr/>
+        </p:nvSpPr>
+        <p:spPr>
+          <a:xfrm>
+            <a:off x="411480" y="3749039"/>
+            <a:ext cx="1737360" cy="256032"/>
+          </a:xfrm>
+          <a:prstGeom prst="rect">
+            <a:avLst/>
+          </a:prstGeom>
+          <a:noFill/>
+        </p:spPr>
+        <p:txBody>
+          <a:bodyPr wrap="square">
+            <a:spAutoFit/>
+          </a:bodyPr>
+          <a:lstStyle/>
+          <a:p>
+            <a:pPr algn="l"/>
+            <a:r>
+              <a:rPr sz="900" b="1">
+                <a:solidFill>
+                  <a:srgbClr val="3C3C3C"/>
+                </a:solidFill>
+              </a:rPr>
+              <a:t>Package Job</a:t>
+            </a:r>
+          </a:p>
+        </p:txBody>
+      </p:sp>
+      <p:sp>
+        <p:nvSpPr>
+          <p:cNvPr id="23" name="TextBox 22"/>
+          <p:cNvSpPr txBox="1"/>
+          <p:nvPr/>
+        </p:nvSpPr>
+        <p:spPr>
+          <a:xfrm>
+            <a:off x="2286000" y="3749039"/>
+            <a:ext cx="6400800" cy="256032"/>
+          </a:xfrm>
+          <a:prstGeom prst="rect">
+            <a:avLst/>
+          </a:prstGeom>
+          <a:noFill/>
+        </p:spPr>
+        <p:txBody>
+          <a:bodyPr wrap="square">
+            <a:spAutoFit/>
+          </a:bodyPr>
+          <a:lstStyle/>
+          <a:p>
+            <a:pPr algn="l"/>
+            <a:r>
+              <a:rPr sz="900" b="0">
+                <a:solidFill>
+                  <a:srgbClr val="3C3C3C"/>
+                </a:solidFill>
+              </a:rPr>
+              <a:t>Zips src/ into lambda.zip. Uploaded as GitHub artifact (30-day retention).</a:t>
+            </a:r>
+          </a:p>
+        </p:txBody>
+      </p:sp>
+      <p:sp>
+        <p:nvSpPr>
+          <p:cNvPr id="24" name="Rectangle 23"/>
+          <p:cNvSpPr/>
+          <p:nvPr/>
+        </p:nvSpPr>
+        <p:spPr>
+          <a:xfrm>
+            <a:off x="365760" y="4059935"/>
+            <a:ext cx="1828800" cy="292608"/>
+          </a:xfrm>
+          <a:prstGeom prst="rect">
+            <a:avLst/>
+          </a:prstGeom>
+          <a:solidFill>
+            <a:srgbClr val="F4F4F4"/>
+          </a:solidFill>
+          <a:ln>
+            <a:solidFill>
+              <a:srgbClr val="3C3C3C"/>
+            </a:solidFill>
+          </a:ln>
+        </p:spPr>
+        <p:style>
+          <a:lnRef idx="1">
+            <a:schemeClr val="accent1"/>
+          </a:lnRef>
+          <a:fillRef idx="3">
+            <a:schemeClr val="accent1"/>
+          </a:fillRef>
+          <a:effectRef idx="2">
+            <a:schemeClr val="accent1"/>
+          </a:effectRef>
+          <a:fontRef idx="minor">
+            <a:schemeClr val="lt1"/>
+          </a:fontRef>
+        </p:style>
+        <p:txBody>
+          <a:bodyPr rtlCol="0" anchor="ctr"/>
+          <a:lstStyle/>
+          <a:p>
+            <a:pPr algn="ctr"/>
+          </a:p>
+        </p:txBody>
+      </p:sp>
+      <p:sp>
+        <p:nvSpPr>
+          <p:cNvPr id="25" name="TextBox 24"/>
+          <p:cNvSpPr txBox="1"/>
+          <p:nvPr/>
+        </p:nvSpPr>
+        <p:spPr>
+          <a:xfrm>
+            <a:off x="411480" y="4096511"/>
+            <a:ext cx="1737360" cy="256032"/>
+          </a:xfrm>
+          <a:prstGeom prst="rect">
+            <a:avLst/>
+          </a:prstGeom>
+          <a:noFill/>
+        </p:spPr>
+        <p:txBody>
+          <a:bodyPr wrap="square">
+            <a:spAutoFit/>
+          </a:bodyPr>
+          <a:lstStyle/>
+          <a:p>
+            <a:pPr algn="l"/>
+            <a:r>
+              <a:rPr sz="900" b="1">
+                <a:solidFill>
+                  <a:srgbClr val="3C3C3C"/>
+                </a:solidFill>
+              </a:rPr>
+              <a:t>Deploy Job</a:t>
+            </a:r>
+          </a:p>
+        </p:txBody>
+      </p:sp>
+      <p:sp>
+        <p:nvSpPr>
+          <p:cNvPr id="26" name="TextBox 25"/>
+          <p:cNvSpPr txBox="1"/>
+          <p:nvPr/>
+        </p:nvSpPr>
+        <p:spPr>
+          <a:xfrm>
+            <a:off x="2286000" y="4096511"/>
+            <a:ext cx="6400800" cy="256032"/>
+          </a:xfrm>
+          <a:prstGeom prst="rect">
+            <a:avLst/>
+          </a:prstGeom>
+          <a:noFill/>
+        </p:spPr>
+        <p:txBody>
+          <a:bodyPr wrap="square">
+            <a:spAutoFit/>
+          </a:bodyPr>
+          <a:lstStyle/>
+          <a:p>
+            <a:pPr algn="l"/>
+            <a:r>
+              <a:rPr sz="900" b="0">
+                <a:solidFill>
+                  <a:srgbClr val="3C3C3C"/>
+                </a:solidFill>
+              </a:rPr>
+              <a:t>terraform apply — only runs on push to main. Deploys Lambda, S3, Glue, Athena.</a:t>
+            </a:r>
+          </a:p>
+        </p:txBody>
+      </p:sp>
+      <p:sp>
+        <p:nvSpPr>
+          <p:cNvPr id="27" name="Rectangle 26"/>
+          <p:cNvSpPr/>
+          <p:nvPr/>
+        </p:nvSpPr>
+        <p:spPr>
+          <a:xfrm>
+            <a:off x="365760" y="4407407"/>
+            <a:ext cx="1828800" cy="292608"/>
+          </a:xfrm>
+          <a:prstGeom prst="rect">
+            <a:avLst/>
+          </a:prstGeom>
+          <a:solidFill>
+            <a:srgbClr val="F4F4F4"/>
+          </a:solidFill>
+          <a:ln>
+            <a:solidFill>
+              <a:srgbClr val="3C3C3C"/>
+            </a:solidFill>
+          </a:ln>
+        </p:spPr>
+        <p:style>
+          <a:lnRef idx="1">
+            <a:schemeClr val="accent1"/>
+          </a:lnRef>
+          <a:fillRef idx="3">
+            <a:schemeClr val="accent1"/>
+          </a:fillRef>
+          <a:effectRef idx="2">
+            <a:schemeClr val="accent1"/>
+          </a:effectRef>
+          <a:fontRef idx="minor">
+            <a:schemeClr val="lt1"/>
+          </a:fontRef>
+        </p:style>
+        <p:txBody>
+          <a:bodyPr rtlCol="0" anchor="ctr"/>
+          <a:lstStyle/>
+          <a:p>
+            <a:pPr algn="ctr"/>
+          </a:p>
+        </p:txBody>
+      </p:sp>
+      <p:sp>
+        <p:nvSpPr>
+          <p:cNvPr id="28" name="TextBox 27"/>
+          <p:cNvSpPr txBox="1"/>
+          <p:nvPr/>
+        </p:nvSpPr>
+        <p:spPr>
+          <a:xfrm>
+            <a:off x="411480" y="4443983"/>
+            <a:ext cx="1737360" cy="256032"/>
+          </a:xfrm>
+          <a:prstGeom prst="rect">
+            <a:avLst/>
+          </a:prstGeom>
+          <a:noFill/>
+        </p:spPr>
+        <p:txBody>
+          <a:bodyPr wrap="square">
+            <a:spAutoFit/>
+          </a:bodyPr>
+          <a:lstStyle/>
+          <a:p>
+            <a:pPr algn="l"/>
+            <a:r>
+              <a:rPr sz="900" b="1">
+                <a:solidFill>
+                  <a:srgbClr val="3C3C3C"/>
+                </a:solidFill>
+              </a:rPr>
+              <a:t>Plan Job</a:t>
+            </a:r>
+          </a:p>
+        </p:txBody>
+      </p:sp>
+      <p:sp>
+        <p:nvSpPr>
+          <p:cNvPr id="29" name="TextBox 28"/>
+          <p:cNvSpPr txBox="1"/>
+          <p:nvPr/>
+        </p:nvSpPr>
+        <p:spPr>
+          <a:xfrm>
+            <a:off x="2286000" y="4443983"/>
+            <a:ext cx="6400800" cy="256032"/>
+          </a:xfrm>
+          <a:prstGeom prst="rect">
+            <a:avLst/>
+          </a:prstGeom>
+          <a:noFill/>
+        </p:spPr>
+        <p:txBody>
+          <a:bodyPr wrap="square">
+            <a:spAutoFit/>
+          </a:bodyPr>
+          <a:lstStyle/>
+          <a:p>
+            <a:pPr algn="l"/>
+            <a:r>
+              <a:rPr sz="900" b="0">
+                <a:solidFill>
+                  <a:srgbClr val="3C3C3C"/>
+                </a:solidFill>
+              </a:rPr>
+              <a:t>terraform plan on every PR. Output posted as PR comment for review before merge.</a:t>
+            </a:r>
+          </a:p>
+        </p:txBody>
+      </p:sp>
+      <p:sp>
+        <p:nvSpPr>
+          <p:cNvPr id="30" name="Rectangle 29"/>
+          <p:cNvSpPr/>
+          <p:nvPr/>
+        </p:nvSpPr>
+        <p:spPr>
+          <a:xfrm>
+            <a:off x="365760" y="4754879"/>
+            <a:ext cx="1828800" cy="292608"/>
+          </a:xfrm>
+          <a:prstGeom prst="rect">
+            <a:avLst/>
+          </a:prstGeom>
+          <a:solidFill>
+            <a:srgbClr val="F4F4F4"/>
+          </a:solidFill>
+          <a:ln>
+            <a:solidFill>
+              <a:srgbClr val="3C3C3C"/>
+            </a:solidFill>
+          </a:ln>
+        </p:spPr>
+        <p:style>
+          <a:lnRef idx="1">
+            <a:schemeClr val="accent1"/>
+          </a:lnRef>
+          <a:fillRef idx="3">
+            <a:schemeClr val="accent1"/>
+          </a:fillRef>
+          <a:effectRef idx="2">
+            <a:schemeClr val="accent1"/>
+          </a:effectRef>
+          <a:fontRef idx="minor">
+            <a:schemeClr val="lt1"/>
+          </a:fontRef>
+        </p:style>
+        <p:txBody>
+          <a:bodyPr rtlCol="0" anchor="ctr"/>
+          <a:lstStyle/>
+          <a:p>
+            <a:pPr algn="ctr"/>
+          </a:p>
+        </p:txBody>
+      </p:sp>
+      <p:sp>
+        <p:nvSpPr>
+          <p:cNvPr id="31" name="TextBox 30"/>
+          <p:cNvSpPr txBox="1"/>
+          <p:nvPr/>
+        </p:nvSpPr>
+        <p:spPr>
+          <a:xfrm>
+            <a:off x="411480" y="4791455"/>
+            <a:ext cx="1737360" cy="256032"/>
+          </a:xfrm>
+          <a:prstGeom prst="rect">
+            <a:avLst/>
+          </a:prstGeom>
+          <a:noFill/>
+        </p:spPr>
+        <p:txBody>
+          <a:bodyPr wrap="square">
+            <a:spAutoFit/>
+          </a:bodyPr>
+          <a:lstStyle/>
+          <a:p>
+            <a:pPr algn="l"/>
+            <a:r>
+              <a:rPr sz="900" b="1">
+                <a:solidFill>
+                  <a:srgbClr val="3C3C3C"/>
+                </a:solidFill>
+              </a:rPr>
+              <a:t>Branch Protection</a:t>
+            </a:r>
+          </a:p>
+        </p:txBody>
+      </p:sp>
+      <p:sp>
+        <p:nvSpPr>
+          <p:cNvPr id="32" name="TextBox 31"/>
+          <p:cNvSpPr txBox="1"/>
+          <p:nvPr/>
+        </p:nvSpPr>
+        <p:spPr>
+          <a:xfrm>
+            <a:off x="2286000" y="4791455"/>
+            <a:ext cx="6400800" cy="256032"/>
+          </a:xfrm>
+          <a:prstGeom prst="rect">
+            <a:avLst/>
+          </a:prstGeom>
+          <a:noFill/>
+        </p:spPr>
+        <p:txBody>
+          <a:bodyPr wrap="square">
+            <a:spAutoFit/>
+          </a:bodyPr>
+          <a:lstStyle/>
+          <a:p>
+            <a:pPr algn="l"/>
+            <a:r>
+              <a:rPr sz="900" b="0">
+                <a:solidFill>
+                  <a:srgbClr val="3C3C3C"/>
+                </a:solidFill>
+              </a:rPr>
+              <a:t>Unit Tests + Package Lambda must pass. 1 PR approval required. No direct push to main.</a:t>
+            </a:r>
+          </a:p>
+        </p:txBody>
+      </p:sp>
+      <p:sp>
+        <p:nvSpPr>
+          <p:cNvPr id="33" name="Rectangle 32"/>
+          <p:cNvSpPr/>
+          <p:nvPr/>
+        </p:nvSpPr>
+        <p:spPr>
+          <a:xfrm>
+            <a:off x="365760" y="5102351"/>
+            <a:ext cx="1828800" cy="292608"/>
+          </a:xfrm>
+          <a:prstGeom prst="rect">
+            <a:avLst/>
+          </a:prstGeom>
+          <a:solidFill>
+            <a:srgbClr val="F4F4F4"/>
+          </a:solidFill>
+          <a:ln>
+            <a:solidFill>
+              <a:srgbClr val="3C3C3C"/>
+            </a:solidFill>
+          </a:ln>
+        </p:spPr>
+        <p:style>
+          <a:lnRef idx="1">
+            <a:schemeClr val="accent1"/>
+          </a:lnRef>
+          <a:fillRef idx="3">
+            <a:schemeClr val="accent1"/>
+          </a:fillRef>
+          <a:effectRef idx="2">
+            <a:schemeClr val="accent1"/>
+          </a:effectRef>
+          <a:fontRef idx="minor">
+            <a:schemeClr val="lt1"/>
+          </a:fontRef>
+        </p:style>
+        <p:txBody>
+          <a:bodyPr rtlCol="0" anchor="ctr"/>
+          <a:lstStyle/>
+          <a:p>
+            <a:pPr algn="ctr"/>
+          </a:p>
+        </p:txBody>
+      </p:sp>
+      <p:sp>
+        <p:nvSpPr>
+          <p:cNvPr id="34" name="TextBox 33"/>
+          <p:cNvSpPr txBox="1"/>
+          <p:nvPr/>
+        </p:nvSpPr>
+        <p:spPr>
+          <a:xfrm>
+            <a:off x="411480" y="5138927"/>
+            <a:ext cx="1737360" cy="256032"/>
+          </a:xfrm>
+          <a:prstGeom prst="rect">
+            <a:avLst/>
+          </a:prstGeom>
+          <a:noFill/>
+        </p:spPr>
+        <p:txBody>
+          <a:bodyPr wrap="square">
+            <a:spAutoFit/>
+          </a:bodyPr>
+          <a:lstStyle/>
+          <a:p>
+            <a:pPr algn="l"/>
+            <a:r>
+              <a:rPr sz="900" b="1">
+                <a:solidFill>
+                  <a:srgbClr val="3C3C3C"/>
+                </a:solidFill>
+              </a:rPr>
+              <a:t>Secrets</a:t>
+            </a:r>
+          </a:p>
+        </p:txBody>
+      </p:sp>
+      <p:sp>
+        <p:nvSpPr>
+          <p:cNvPr id="35" name="TextBox 34"/>
+          <p:cNvSpPr txBox="1"/>
+          <p:nvPr/>
+        </p:nvSpPr>
+        <p:spPr>
+          <a:xfrm>
+            <a:off x="2286000" y="5138927"/>
+            <a:ext cx="6400800" cy="256032"/>
+          </a:xfrm>
+          <a:prstGeom prst="rect">
+            <a:avLst/>
+          </a:prstGeom>
+          <a:noFill/>
+        </p:spPr>
+        <p:txBody>
+          <a:bodyPr wrap="square">
+            <a:spAutoFit/>
+          </a:bodyPr>
+          <a:lstStyle/>
+          <a:p>
+            <a:pPr algn="l"/>
+            <a:r>
+              <a:rPr sz="900" b="0">
+                <a:solidFill>
+                  <a:srgbClr val="3C3C3C"/>
+                </a:solidFill>
+              </a:rPr>
+              <a:t>AWS_ACCESS_KEY_ID and AWS_SECRET_ACCESS_KEY stored in GitHub Secrets — never in code.</a:t>
+            </a:r>
+          </a:p>
+        </p:txBody>
+      </p:sp>
+    </p:spTree>
+  </p:cSld>
+  <p:clrMapOvr>
+    <a:masterClrMapping/>
+  </p:clrMapOvr>
+</p:sld>
+</file>
+
+<file path=ppt/slides/slide13.xml><?xml version="1.0" encoding="utf-8"?>
+<p:sld xmlns:a="http://schemas.openxmlformats.org/drawingml/2006/main" xmlns:p="http://schemas.openxmlformats.org/presentationml/2006/main" xmlns:r="http://schemas.openxmlformats.org/officeDocument/2006/relationships">
+  <p:cSld>
+    <p:spTree>
+      <p:nvGrpSpPr>
+        <p:cNvPr id="1" name=""/>
+        <p:cNvGrpSpPr/>
+        <p:nvPr/>
+      </p:nvGrpSpPr>
+      <p:grpSpPr/>
+      <p:sp>
+        <p:nvSpPr>
+          <p:cNvPr id="2" name="Rectangle 1"/>
+          <p:cNvSpPr/>
+          <p:nvPr/>
+        </p:nvSpPr>
+        <p:spPr>
+          <a:xfrm>
+            <a:off x="0" y="0"/>
+            <a:ext cx="9144000" cy="1005840"/>
+          </a:xfrm>
+          <a:prstGeom prst="rect">
+            <a:avLst/>
+          </a:prstGeom>
+          <a:solidFill>
+            <a:srgbClr val="EB1C24"/>
+          </a:solidFill>
+          <a:ln>
+            <a:noFill/>
+          </a:ln>
+        </p:spPr>
+        <p:style>
+          <a:lnRef idx="1">
+            <a:schemeClr val="accent1"/>
+          </a:lnRef>
+          <a:fillRef idx="3">
+            <a:schemeClr val="accent1"/>
+          </a:fillRef>
+          <a:effectRef idx="2">
+            <a:schemeClr val="accent1"/>
+          </a:effectRef>
+          <a:fontRef idx="minor">
+            <a:schemeClr val="lt1"/>
+          </a:fontRef>
+        </p:style>
+        <p:txBody>
+          <a:bodyPr rtlCol="0" anchor="ctr"/>
+          <a:lstStyle/>
+          <a:p>
+            <a:pPr algn="ctr"/>
+          </a:p>
+        </p:txBody>
+      </p:sp>
+      <p:sp>
+        <p:nvSpPr>
+          <p:cNvPr id="3" name="TextBox 2"/>
+          <p:cNvSpPr txBox="1"/>
+          <p:nvPr/>
+        </p:nvSpPr>
+        <p:spPr>
+          <a:xfrm>
+            <a:off x="274320" y="182880"/>
+            <a:ext cx="8595360" cy="731520"/>
+          </a:xfrm>
+          <a:prstGeom prst="rect">
+            <a:avLst/>
+          </a:prstGeom>
+          <a:noFill/>
+        </p:spPr>
+        <p:txBody>
+          <a:bodyPr wrap="square">
+            <a:spAutoFit/>
+          </a:bodyPr>
+          <a:lstStyle/>
+          <a:p>
+            <a:pPr algn="l"/>
+            <a:r>
+              <a:rPr sz="2400" b="1">
+                <a:solidFill>
+                  <a:srgbClr val="FFFFFF"/>
+                </a:solidFill>
+              </a:rPr>
+              <a:t>AWS Architecture — Medallion Lakehouse</a:t>
+            </a:r>
+          </a:p>
+        </p:txBody>
+      </p:sp>
+      <p:sp>
+        <p:nvSpPr>
+          <p:cNvPr id="4" name="Rectangle 3"/>
+          <p:cNvSpPr/>
+          <p:nvPr/>
+        </p:nvSpPr>
+        <p:spPr>
+          <a:xfrm>
+            <a:off x="0" y="6309360"/>
+            <a:ext cx="9144000" cy="548640"/>
+          </a:xfrm>
+          <a:prstGeom prst="rect">
+            <a:avLst/>
+          </a:prstGeom>
+          <a:solidFill>
+            <a:srgbClr val="3C3C3C"/>
+          </a:solidFill>
+          <a:ln>
+            <a:noFill/>
+          </a:ln>
+        </p:spPr>
+        <p:style>
+          <a:lnRef idx="1">
+            <a:schemeClr val="accent1"/>
+          </a:lnRef>
+          <a:fillRef idx="3">
+            <a:schemeClr val="accent1"/>
+          </a:fillRef>
+          <a:effectRef idx="2">
+            <a:schemeClr val="accent1"/>
+          </a:effectRef>
+          <a:fontRef idx="minor">
+            <a:schemeClr val="lt1"/>
+          </a:fontRef>
+        </p:style>
+        <p:txBody>
+          <a:bodyPr rtlCol="0" anchor="ctr"/>
+          <a:lstStyle/>
+          <a:p>
+            <a:pPr algn="ctr"/>
+          </a:p>
+        </p:txBody>
+      </p:sp>
+      <p:sp>
+        <p:nvSpPr>
+          <p:cNvPr id="5" name="TextBox 4"/>
+          <p:cNvSpPr txBox="1"/>
+          <p:nvPr/>
+        </p:nvSpPr>
+        <p:spPr>
+          <a:xfrm>
+            <a:off x="274320" y="6355080"/>
+            <a:ext cx="8595360" cy="365760"/>
+          </a:xfrm>
+          <a:prstGeom prst="rect">
+            <a:avLst/>
+          </a:prstGeom>
+          <a:noFill/>
+        </p:spPr>
+        <p:txBody>
+          <a:bodyPr wrap="square">
+            <a:spAutoFit/>
+          </a:bodyPr>
+          <a:lstStyle/>
+          <a:p>
+            <a:pPr algn="ctr"/>
+            <a:r>
+              <a:rPr sz="900" b="0">
+                <a:solidFill>
+                  <a:srgbClr val="FFFFFF"/>
+                </a:solidFill>
+              </a:rPr>
+              <a:t>Adobe Data Engineer Assessment  |  Search Keyword Performance Analyzer  |  Architecture</a:t>
+            </a:r>
+          </a:p>
+        </p:txBody>
+      </p:sp>
+      <p:sp>
+        <p:nvSpPr>
+          <p:cNvPr id="6" name="Rectangle 5"/>
+          <p:cNvSpPr/>
+          <p:nvPr/>
+        </p:nvSpPr>
+        <p:spPr>
+          <a:xfrm>
+            <a:off x="274320" y="1188720"/>
+            <a:ext cx="1554480" cy="4389120"/>
+          </a:xfrm>
+          <a:prstGeom prst="rect">
+            <a:avLst/>
+          </a:prstGeom>
+          <a:solidFill>
+            <a:srgbClr val="E8F4E8"/>
+          </a:solidFill>
+          <a:ln>
+            <a:solidFill>
+              <a:srgbClr val="3C3C3C"/>
+            </a:solidFill>
+          </a:ln>
+        </p:spPr>
+        <p:style>
+          <a:lnRef idx="1">
+            <a:schemeClr val="accent1"/>
+          </a:lnRef>
+          <a:fillRef idx="3">
+            <a:schemeClr val="accent1"/>
+          </a:fillRef>
+          <a:effectRef idx="2">
+            <a:schemeClr val="accent1"/>
+          </a:effectRef>
+          <a:fontRef idx="minor">
+            <a:schemeClr val="lt1"/>
+          </a:fontRef>
+        </p:style>
+        <p:txBody>
+          <a:bodyPr rtlCol="0" anchor="ctr"/>
+          <a:lstStyle/>
+          <a:p>
+            <a:pPr algn="ctr"/>
+          </a:p>
+        </p:txBody>
+      </p:sp>
+      <p:sp>
+        <p:nvSpPr>
+          <p:cNvPr id="7" name="TextBox 6"/>
+          <p:cNvSpPr txBox="1"/>
+          <p:nvPr/>
+        </p:nvSpPr>
+        <p:spPr>
+          <a:xfrm>
+            <a:off x="274320" y="1234440"/>
+            <a:ext cx="1554480" cy="274320"/>
+          </a:xfrm>
+          <a:prstGeom prst="rect">
+            <a:avLst/>
+          </a:prstGeom>
+          <a:noFill/>
+        </p:spPr>
+        <p:txBody>
+          <a:bodyPr wrap="square">
+            <a:spAutoFit/>
+          </a:bodyPr>
+          <a:lstStyle/>
+          <a:p>
+            <a:pPr algn="ctr"/>
+            <a:r>
+              <a:rPr sz="800" b="1">
+                <a:solidFill>
+                  <a:srgbClr val="3C3C3C"/>
+                </a:solidFill>
+              </a:rPr>
+              <a:t>TRIGGER</a:t>
+            </a:r>
+          </a:p>
+        </p:txBody>
+      </p:sp>
+      <p:sp>
+        <p:nvSpPr>
+          <p:cNvPr id="8" name="TextBox 7"/>
+          <p:cNvSpPr txBox="1"/>
+          <p:nvPr/>
+        </p:nvSpPr>
+        <p:spPr>
+          <a:xfrm>
+            <a:off x="274320" y="1600200"/>
+            <a:ext cx="1554480" cy="3886200"/>
+          </a:xfrm>
+          <a:prstGeom prst="rect">
+            <a:avLst/>
+          </a:prstGeom>
+          <a:noFill/>
+        </p:spPr>
+        <p:txBody>
+          <a:bodyPr wrap="square">
+            <a:spAutoFit/>
+          </a:bodyPr>
+          <a:lstStyle/>
+          <a:p>
+            <a:pPr algn="ctr"/>
+            <a:r>
+              <a:rPr sz="1000" b="0">
+                <a:solidFill>
+                  <a:srgbClr val="3C3C3C"/>
+                </a:solidFill>
+              </a:rPr>
+              <a:t>S3
+landing/
+data.sql</a:t>
+            </a:r>
+          </a:p>
+        </p:txBody>
+      </p:sp>
+      <p:sp>
+        <p:nvSpPr>
+          <p:cNvPr id="9" name="Rectangle 8"/>
+          <p:cNvSpPr/>
+          <p:nvPr/>
+        </p:nvSpPr>
+        <p:spPr>
+          <a:xfrm>
+            <a:off x="2011680" y="1188720"/>
+            <a:ext cx="1554480" cy="4389120"/>
+          </a:xfrm>
+          <a:prstGeom prst="rect">
+            <a:avLst/>
+          </a:prstGeom>
+          <a:solidFill>
+            <a:srgbClr val="E8F0F8"/>
+          </a:solidFill>
+          <a:ln>
+            <a:solidFill>
+              <a:srgbClr val="3C3C3C"/>
+            </a:solidFill>
+          </a:ln>
+        </p:spPr>
+        <p:style>
+          <a:lnRef idx="1">
+            <a:schemeClr val="accent1"/>
+          </a:lnRef>
+          <a:fillRef idx="3">
+            <a:schemeClr val="accent1"/>
+          </a:fillRef>
+          <a:effectRef idx="2">
+            <a:schemeClr val="accent1"/>
+          </a:effectRef>
+          <a:fontRef idx="minor">
+            <a:schemeClr val="lt1"/>
+          </a:fontRef>
+        </p:style>
+        <p:txBody>
+          <a:bodyPr rtlCol="0" anchor="ctr"/>
+          <a:lstStyle/>
+          <a:p>
+            <a:pPr algn="ctr"/>
+          </a:p>
+        </p:txBody>
+      </p:sp>
+      <p:sp>
+        <p:nvSpPr>
+          <p:cNvPr id="10" name="TextBox 9"/>
+          <p:cNvSpPr txBox="1"/>
+          <p:nvPr/>
+        </p:nvSpPr>
+        <p:spPr>
+          <a:xfrm>
+            <a:off x="2011680" y="1234440"/>
+            <a:ext cx="1554480" cy="274320"/>
+          </a:xfrm>
+          <a:prstGeom prst="rect">
+            <a:avLst/>
+          </a:prstGeom>
+          <a:noFill/>
+        </p:spPr>
+        <p:txBody>
+          <a:bodyPr wrap="square">
+            <a:spAutoFit/>
+          </a:bodyPr>
+          <a:lstStyle/>
+          <a:p>
+            <a:pPr algn="ctr"/>
+            <a:r>
+              <a:rPr sz="800" b="1">
+                <a:solidFill>
+                  <a:srgbClr val="3C3C3C"/>
+                </a:solidFill>
+              </a:rPr>
+              <a:t>COMPUTE</a:t>
+            </a:r>
+          </a:p>
+        </p:txBody>
+      </p:sp>
+      <p:sp>
+        <p:nvSpPr>
+          <p:cNvPr id="11" name="TextBox 10"/>
+          <p:cNvSpPr txBox="1"/>
+          <p:nvPr/>
+        </p:nvSpPr>
+        <p:spPr>
+          <a:xfrm>
+            <a:off x="2011680" y="1600200"/>
+            <a:ext cx="1554480" cy="3886200"/>
+          </a:xfrm>
+          <a:prstGeom prst="rect">
+            <a:avLst/>
+          </a:prstGeom>
+          <a:noFill/>
+        </p:spPr>
+        <p:txBody>
+          <a:bodyPr wrap="square">
+            <a:spAutoFit/>
+          </a:bodyPr>
+          <a:lstStyle/>
+          <a:p>
+            <a:pPr algn="ctr"/>
+            <a:r>
+              <a:rPr sz="1000" b="0">
+                <a:solidFill>
+                  <a:srgbClr val="3C3C3C"/>
+                </a:solidFill>
+              </a:rPr>
+              <a:t>AWS Lambda
+Python 3.12
+512 MB / 5 min</a:t>
+            </a:r>
+          </a:p>
+        </p:txBody>
+      </p:sp>
+      <p:sp>
+        <p:nvSpPr>
+          <p:cNvPr id="12" name="Rectangle 11"/>
+          <p:cNvSpPr/>
+          <p:nvPr/>
+        </p:nvSpPr>
+        <p:spPr>
+          <a:xfrm>
+            <a:off x="3749039" y="1188720"/>
+            <a:ext cx="1554480" cy="4389120"/>
+          </a:xfrm>
+          <a:prstGeom prst="rect">
+            <a:avLst/>
+          </a:prstGeom>
+          <a:solidFill>
+            <a:srgbClr val="F8F0E8"/>
+          </a:solidFill>
+          <a:ln>
+            <a:solidFill>
+              <a:srgbClr val="3C3C3C"/>
+            </a:solidFill>
+          </a:ln>
+        </p:spPr>
+        <p:style>
+          <a:lnRef idx="1">
+            <a:schemeClr val="accent1"/>
+          </a:lnRef>
+          <a:fillRef idx="3">
+            <a:schemeClr val="accent1"/>
+          </a:fillRef>
+          <a:effectRef idx="2">
+            <a:schemeClr val="accent1"/>
+          </a:effectRef>
+          <a:fontRef idx="minor">
+            <a:schemeClr val="lt1"/>
+          </a:fontRef>
+        </p:style>
+        <p:txBody>
+          <a:bodyPr rtlCol="0" anchor="ctr"/>
+          <a:lstStyle/>
+          <a:p>
+            <a:pPr algn="ctr"/>
+          </a:p>
+        </p:txBody>
+      </p:sp>
+      <p:sp>
+        <p:nvSpPr>
+          <p:cNvPr id="13" name="TextBox 12"/>
+          <p:cNvSpPr txBox="1"/>
+          <p:nvPr/>
+        </p:nvSpPr>
+        <p:spPr>
+          <a:xfrm>
+            <a:off x="3749039" y="1234440"/>
+            <a:ext cx="1554480" cy="274320"/>
+          </a:xfrm>
+          <a:prstGeom prst="rect">
+            <a:avLst/>
+          </a:prstGeom>
+          <a:noFill/>
+        </p:spPr>
+        <p:txBody>
+          <a:bodyPr wrap="square">
+            <a:spAutoFit/>
+          </a:bodyPr>
+          <a:lstStyle/>
+          <a:p>
+            <a:pPr algn="ctr"/>
+            <a:r>
+              <a:rPr sz="800" b="1">
+                <a:solidFill>
+                  <a:srgbClr val="3C3C3C"/>
+                </a:solidFill>
+              </a:rPr>
+              <a:t>BRONZE</a:t>
+            </a:r>
+          </a:p>
+        </p:txBody>
+      </p:sp>
+      <p:sp>
+        <p:nvSpPr>
+          <p:cNvPr id="14" name="TextBox 13"/>
+          <p:cNvSpPr txBox="1"/>
+          <p:nvPr/>
+        </p:nvSpPr>
+        <p:spPr>
+          <a:xfrm>
+            <a:off x="3749039" y="1600200"/>
+            <a:ext cx="1554480" cy="3886200"/>
+          </a:xfrm>
+          <a:prstGeom prst="rect">
+            <a:avLst/>
+          </a:prstGeom>
+          <a:noFill/>
+        </p:spPr>
+        <p:txBody>
+          <a:bodyPr wrap="square">
+            <a:spAutoFit/>
+          </a:bodyPr>
+          <a:lstStyle/>
+          <a:p>
+            <a:pPr algn="ctr"/>
+            <a:r>
+              <a:rPr sz="1000" b="0">
+                <a:solidFill>
+                  <a:srgbClr val="3C3C3C"/>
+                </a:solidFill>
+              </a:rPr>
+              <a:t>S3
+bronze/
+Raw Archive</a:t>
+            </a:r>
+          </a:p>
+        </p:txBody>
+      </p:sp>
+      <p:sp>
+        <p:nvSpPr>
+          <p:cNvPr id="15" name="Rectangle 14"/>
+          <p:cNvSpPr/>
+          <p:nvPr/>
+        </p:nvSpPr>
+        <p:spPr>
+          <a:xfrm>
+            <a:off x="5486400" y="1188720"/>
+            <a:ext cx="1554480" cy="4389120"/>
+          </a:xfrm>
+          <a:prstGeom prst="rect">
+            <a:avLst/>
+          </a:prstGeom>
+          <a:solidFill>
+            <a:srgbClr val="F8F8E8"/>
+          </a:solidFill>
+          <a:ln>
+            <a:solidFill>
+              <a:srgbClr val="3C3C3C"/>
+            </a:solidFill>
+          </a:ln>
+        </p:spPr>
+        <p:style>
+          <a:lnRef idx="1">
+            <a:schemeClr val="accent1"/>
+          </a:lnRef>
+          <a:fillRef idx="3">
+            <a:schemeClr val="accent1"/>
+          </a:fillRef>
+          <a:effectRef idx="2">
+            <a:schemeClr val="accent1"/>
+          </a:effectRef>
+          <a:fontRef idx="minor">
+            <a:schemeClr val="lt1"/>
+          </a:fontRef>
+        </p:style>
+        <p:txBody>
+          <a:bodyPr rtlCol="0" anchor="ctr"/>
+          <a:lstStyle/>
+          <a:p>
+            <a:pPr algn="ctr"/>
+          </a:p>
+        </p:txBody>
+      </p:sp>
+      <p:sp>
+        <p:nvSpPr>
+          <p:cNvPr id="16" name="TextBox 15"/>
+          <p:cNvSpPr txBox="1"/>
+          <p:nvPr/>
+        </p:nvSpPr>
+        <p:spPr>
+          <a:xfrm>
+            <a:off x="5486400" y="1234440"/>
+            <a:ext cx="1554480" cy="274320"/>
+          </a:xfrm>
+          <a:prstGeom prst="rect">
+            <a:avLst/>
+          </a:prstGeom>
+          <a:noFill/>
+        </p:spPr>
+        <p:txBody>
+          <a:bodyPr wrap="square">
+            <a:spAutoFit/>
+          </a:bodyPr>
+          <a:lstStyle/>
+          <a:p>
+            <a:pPr algn="ctr"/>
+            <a:r>
+              <a:rPr sz="800" b="1">
+                <a:solidFill>
+                  <a:srgbClr val="3C3C3C"/>
+                </a:solidFill>
+              </a:rPr>
+              <a:t>GOLD</a:t>
+            </a:r>
+          </a:p>
+        </p:txBody>
+      </p:sp>
+      <p:sp>
+        <p:nvSpPr>
+          <p:cNvPr id="17" name="TextBox 16"/>
+          <p:cNvSpPr txBox="1"/>
+          <p:nvPr/>
+        </p:nvSpPr>
+        <p:spPr>
+          <a:xfrm>
+            <a:off x="5486400" y="1600200"/>
+            <a:ext cx="1554480" cy="3886200"/>
+          </a:xfrm>
+          <a:prstGeom prst="rect">
+            <a:avLst/>
+          </a:prstGeom>
+          <a:noFill/>
+        </p:spPr>
+        <p:txBody>
+          <a:bodyPr wrap="square">
+            <a:spAutoFit/>
+          </a:bodyPr>
+          <a:lstStyle/>
+          <a:p>
+            <a:pPr algn="ctr"/>
+            <a:r>
+              <a:rPr sz="1000" b="0">
+                <a:solidFill>
+                  <a:srgbClr val="3C3C3C"/>
+                </a:solidFill>
+              </a:rPr>
+              <a:t>S3
+gold/
+Output .tab</a:t>
+            </a:r>
+          </a:p>
+        </p:txBody>
+      </p:sp>
+      <p:sp>
+        <p:nvSpPr>
+          <p:cNvPr id="18" name="Rectangle 17"/>
+          <p:cNvSpPr/>
+          <p:nvPr/>
+        </p:nvSpPr>
+        <p:spPr>
+          <a:xfrm>
+            <a:off x="7223760" y="1188720"/>
+            <a:ext cx="1554480" cy="4389120"/>
+          </a:xfrm>
+          <a:prstGeom prst="rect">
+            <a:avLst/>
+          </a:prstGeom>
+          <a:solidFill>
+            <a:srgbClr val="F0E8F8"/>
+          </a:solidFill>
+          <a:ln>
+            <a:solidFill>
+              <a:srgbClr val="3C3C3C"/>
+            </a:solidFill>
+          </a:ln>
+        </p:spPr>
+        <p:style>
+          <a:lnRef idx="1">
+            <a:schemeClr val="accent1"/>
+          </a:lnRef>
+          <a:fillRef idx="3">
+            <a:schemeClr val="accent1"/>
+          </a:fillRef>
+          <a:effectRef idx="2">
+            <a:schemeClr val="accent1"/>
+          </a:effectRef>
+          <a:fontRef idx="minor">
+            <a:schemeClr val="lt1"/>
+          </a:fontRef>
+        </p:style>
+        <p:txBody>
+          <a:bodyPr rtlCol="0" anchor="ctr"/>
+          <a:lstStyle/>
+          <a:p>
+            <a:pPr algn="ctr"/>
+          </a:p>
+        </p:txBody>
+      </p:sp>
+      <p:sp>
+        <p:nvSpPr>
+          <p:cNvPr id="19" name="TextBox 18"/>
+          <p:cNvSpPr txBox="1"/>
+          <p:nvPr/>
+        </p:nvSpPr>
+        <p:spPr>
+          <a:xfrm>
+            <a:off x="7223760" y="1234440"/>
+            <a:ext cx="1554480" cy="274320"/>
+          </a:xfrm>
+          <a:prstGeom prst="rect">
+            <a:avLst/>
+          </a:prstGeom>
+          <a:noFill/>
+        </p:spPr>
+        <p:txBody>
+          <a:bodyPr wrap="square">
+            <a:spAutoFit/>
+          </a:bodyPr>
+          <a:lstStyle/>
+          <a:p>
+            <a:pPr algn="ctr"/>
+            <a:r>
+              <a:rPr sz="800" b="1">
+                <a:solidFill>
+                  <a:srgbClr val="3C3C3C"/>
+                </a:solidFill>
+              </a:rPr>
+              <a:t>QUERY</a:t>
+            </a:r>
+          </a:p>
+        </p:txBody>
+      </p:sp>
+      <p:sp>
+        <p:nvSpPr>
+          <p:cNvPr id="20" name="TextBox 19"/>
+          <p:cNvSpPr txBox="1"/>
+          <p:nvPr/>
+        </p:nvSpPr>
+        <p:spPr>
+          <a:xfrm>
+            <a:off x="7223760" y="1600200"/>
+            <a:ext cx="1554480" cy="3886200"/>
+          </a:xfrm>
+          <a:prstGeom prst="rect">
+            <a:avLst/>
+          </a:prstGeom>
+          <a:noFill/>
+        </p:spPr>
+        <p:txBody>
+          <a:bodyPr wrap="square">
+            <a:spAutoFit/>
+          </a:bodyPr>
+          <a:lstStyle/>
+          <a:p>
+            <a:pPr algn="ctr"/>
+            <a:r>
+              <a:rPr sz="1000" b="0">
+                <a:solidFill>
+                  <a:srgbClr val="3C3C3C"/>
+                </a:solidFill>
+              </a:rPr>
+              <a:t>Athena
++
+Glue Catalog</a:t>
+            </a:r>
+          </a:p>
+        </p:txBody>
+      </p:sp>
+      <p:sp>
+        <p:nvSpPr>
+          <p:cNvPr id="21" name="TextBox 20"/>
+          <p:cNvSpPr txBox="1"/>
+          <p:nvPr/>
+        </p:nvSpPr>
+        <p:spPr>
+          <a:xfrm>
+            <a:off x="1801368" y="3017520"/>
+            <a:ext cx="228600" cy="365760"/>
+          </a:xfrm>
+          <a:prstGeom prst="rect">
+            <a:avLst/>
+          </a:prstGeom>
+          <a:noFill/>
+        </p:spPr>
+        <p:txBody>
+          <a:bodyPr wrap="square">
+            <a:spAutoFit/>
+          </a:bodyPr>
+          <a:lstStyle/>
+          <a:p>
+            <a:pPr algn="l"/>
+            <a:r>
+              <a:rPr sz="1800" b="1">
+                <a:solidFill>
+                  <a:srgbClr val="3C3C3C"/>
+                </a:solidFill>
+              </a:rPr>
+              <a:t>▶</a:t>
+            </a:r>
+          </a:p>
+        </p:txBody>
+      </p:sp>
+      <p:sp>
+        <p:nvSpPr>
+          <p:cNvPr id="22" name="TextBox 21"/>
+          <p:cNvSpPr txBox="1"/>
+          <p:nvPr/>
+        </p:nvSpPr>
+        <p:spPr>
+          <a:xfrm>
+            <a:off x="3538728" y="3017520"/>
+            <a:ext cx="228600" cy="365760"/>
+          </a:xfrm>
+          <a:prstGeom prst="rect">
+            <a:avLst/>
+          </a:prstGeom>
+          <a:noFill/>
+        </p:spPr>
+        <p:txBody>
+          <a:bodyPr wrap="square">
+            <a:spAutoFit/>
+          </a:bodyPr>
+          <a:lstStyle/>
+          <a:p>
+            <a:pPr algn="l"/>
+            <a:r>
+              <a:rPr sz="1800" b="1">
+                <a:solidFill>
+                  <a:srgbClr val="3C3C3C"/>
+                </a:solidFill>
+              </a:rPr>
+              <a:t>▶</a:t>
+            </a:r>
+          </a:p>
+        </p:txBody>
+      </p:sp>
+      <p:sp>
+        <p:nvSpPr>
+          <p:cNvPr id="23" name="TextBox 22"/>
+          <p:cNvSpPr txBox="1"/>
+          <p:nvPr/>
+        </p:nvSpPr>
+        <p:spPr>
+          <a:xfrm>
+            <a:off x="5276088" y="3017520"/>
+            <a:ext cx="228600" cy="365760"/>
+          </a:xfrm>
+          <a:prstGeom prst="rect">
+            <a:avLst/>
+          </a:prstGeom>
+          <a:noFill/>
+        </p:spPr>
+        <p:txBody>
+          <a:bodyPr wrap="square">
+            <a:spAutoFit/>
+          </a:bodyPr>
+          <a:lstStyle/>
+          <a:p>
+            <a:pPr algn="l"/>
+            <a:r>
+              <a:rPr sz="1800" b="1">
+                <a:solidFill>
+                  <a:srgbClr val="3C3C3C"/>
+                </a:solidFill>
+              </a:rPr>
+              <a:t>▶</a:t>
+            </a:r>
+          </a:p>
+        </p:txBody>
+      </p:sp>
+      <p:sp>
+        <p:nvSpPr>
+          <p:cNvPr id="24" name="TextBox 23"/>
+          <p:cNvSpPr txBox="1"/>
+          <p:nvPr/>
+        </p:nvSpPr>
+        <p:spPr>
+          <a:xfrm>
+            <a:off x="7013448" y="3017520"/>
+            <a:ext cx="228600" cy="365760"/>
+          </a:xfrm>
+          <a:prstGeom prst="rect">
+            <a:avLst/>
+          </a:prstGeom>
+          <a:noFill/>
+        </p:spPr>
+        <p:txBody>
+          <a:bodyPr wrap="square">
+            <a:spAutoFit/>
+          </a:bodyPr>
+          <a:lstStyle/>
+          <a:p>
+            <a:pPr algn="l"/>
+            <a:r>
+              <a:rPr sz="1800" b="1">
+                <a:solidFill>
+                  <a:srgbClr val="3C3C3C"/>
+                </a:solidFill>
+              </a:rPr>
+              <a:t>▶</a:t>
+            </a:r>
+          </a:p>
+        </p:txBody>
+      </p:sp>
+      <p:sp>
+        <p:nvSpPr>
+          <p:cNvPr id="25" name="TextBox 24"/>
+          <p:cNvSpPr txBox="1"/>
+          <p:nvPr/>
+        </p:nvSpPr>
+        <p:spPr>
+          <a:xfrm>
+            <a:off x="274320" y="5577840"/>
+            <a:ext cx="8686800" cy="274320"/>
+          </a:xfrm>
+          <a:prstGeom prst="rect">
+            <a:avLst/>
+          </a:prstGeom>
+          <a:noFill/>
+        </p:spPr>
+        <p:txBody>
+          <a:bodyPr wrap="square">
+            <a:spAutoFit/>
+          </a:bodyPr>
+          <a:lstStyle/>
+          <a:p>
+            <a:pPr algn="l"/>
+            <a:r>
+              <a:rPr sz="1000" b="1">
+                <a:solidFill>
+                  <a:srgbClr val="3C3C3C"/>
+                </a:solidFill>
+              </a:rPr>
+              <a:t>Supporting Services</a:t>
+            </a:r>
+          </a:p>
+        </p:txBody>
+      </p:sp>
+      <p:sp>
+        <p:nvSpPr>
+          <p:cNvPr id="26" name="Rectangle 25"/>
+          <p:cNvSpPr/>
+          <p:nvPr/>
+        </p:nvSpPr>
+        <p:spPr>
+          <a:xfrm>
+            <a:off x="274320" y="5897880"/>
+            <a:ext cx="1600200" cy="320040"/>
+          </a:xfrm>
+          <a:prstGeom prst="rect">
+            <a:avLst/>
+          </a:prstGeom>
+          <a:solidFill>
+            <a:srgbClr val="3C3C3C"/>
+          </a:solidFill>
+          <a:ln>
+            <a:noFill/>
+          </a:ln>
+        </p:spPr>
+        <p:style>
+          <a:lnRef idx="1">
+            <a:schemeClr val="accent1"/>
+          </a:lnRef>
+          <a:fillRef idx="3">
+            <a:schemeClr val="accent1"/>
+          </a:fillRef>
+          <a:effectRef idx="2">
+            <a:schemeClr val="accent1"/>
+          </a:effectRef>
+          <a:fontRef idx="minor">
+            <a:schemeClr val="lt1"/>
+          </a:fontRef>
+        </p:style>
+        <p:txBody>
+          <a:bodyPr rtlCol="0" anchor="ctr"/>
+          <a:lstStyle/>
+          <a:p>
+            <a:pPr algn="ctr"/>
+          </a:p>
+        </p:txBody>
+      </p:sp>
+      <p:sp>
+        <p:nvSpPr>
+          <p:cNvPr id="27" name="TextBox 26"/>
+          <p:cNvSpPr txBox="1"/>
+          <p:nvPr/>
+        </p:nvSpPr>
+        <p:spPr>
+          <a:xfrm>
+            <a:off x="320040" y="5925312"/>
+            <a:ext cx="1508760" cy="256032"/>
+          </a:xfrm>
+          <a:prstGeom prst="rect">
+            <a:avLst/>
+          </a:prstGeom>
+          <a:noFill/>
+        </p:spPr>
+        <p:txBody>
+          <a:bodyPr wrap="square">
+            <a:spAutoFit/>
+          </a:bodyPr>
+          <a:lstStyle/>
+          <a:p>
+            <a:pPr algn="ctr"/>
+            <a:r>
+              <a:rPr sz="800" b="1">
+                <a:solidFill>
+                  <a:srgbClr val="FFFFFF"/>
+                </a:solidFill>
+              </a:rPr>
+              <a:t>KMS Encryption</a:t>
+            </a:r>
+          </a:p>
+        </p:txBody>
+      </p:sp>
+      <p:sp>
+        <p:nvSpPr>
+          <p:cNvPr id="28" name="Rectangle 27"/>
+          <p:cNvSpPr/>
+          <p:nvPr/>
+        </p:nvSpPr>
+        <p:spPr>
+          <a:xfrm>
+            <a:off x="2011679" y="5897880"/>
+            <a:ext cx="1600200" cy="320040"/>
+          </a:xfrm>
+          <a:prstGeom prst="rect">
+            <a:avLst/>
+          </a:prstGeom>
+          <a:solidFill>
+            <a:srgbClr val="3C3C3C"/>
+          </a:solidFill>
+          <a:ln>
+            <a:noFill/>
+          </a:ln>
+        </p:spPr>
+        <p:style>
+          <a:lnRef idx="1">
+            <a:schemeClr val="accent1"/>
+          </a:lnRef>
+          <a:fillRef idx="3">
+            <a:schemeClr val="accent1"/>
+          </a:fillRef>
+          <a:effectRef idx="2">
+            <a:schemeClr val="accent1"/>
+          </a:effectRef>
+          <a:fontRef idx="minor">
+            <a:schemeClr val="lt1"/>
+          </a:fontRef>
+        </p:style>
+        <p:txBody>
+          <a:bodyPr rtlCol="0" anchor="ctr"/>
+          <a:lstStyle/>
+          <a:p>
+            <a:pPr algn="ctr"/>
+          </a:p>
+        </p:txBody>
+      </p:sp>
+      <p:sp>
+        <p:nvSpPr>
+          <p:cNvPr id="29" name="TextBox 28"/>
+          <p:cNvSpPr txBox="1"/>
+          <p:nvPr/>
+        </p:nvSpPr>
+        <p:spPr>
+          <a:xfrm>
+            <a:off x="2057399" y="5925312"/>
+            <a:ext cx="1508760" cy="256032"/>
+          </a:xfrm>
+          <a:prstGeom prst="rect">
+            <a:avLst/>
+          </a:prstGeom>
+          <a:noFill/>
+        </p:spPr>
+        <p:txBody>
+          <a:bodyPr wrap="square">
+            <a:spAutoFit/>
+          </a:bodyPr>
+          <a:lstStyle/>
+          <a:p>
+            <a:pPr algn="ctr"/>
+            <a:r>
+              <a:rPr sz="800" b="1">
+                <a:solidFill>
+                  <a:srgbClr val="FFFFFF"/>
+                </a:solidFill>
+              </a:rPr>
+              <a:t>CloudWatch Logs</a:t>
+            </a:r>
+          </a:p>
+        </p:txBody>
+      </p:sp>
+      <p:sp>
+        <p:nvSpPr>
+          <p:cNvPr id="30" name="Rectangle 29"/>
+          <p:cNvSpPr/>
+          <p:nvPr/>
+        </p:nvSpPr>
+        <p:spPr>
+          <a:xfrm>
+            <a:off x="3749039" y="5897880"/>
+            <a:ext cx="1600200" cy="320040"/>
+          </a:xfrm>
+          <a:prstGeom prst="rect">
+            <a:avLst/>
+          </a:prstGeom>
+          <a:solidFill>
+            <a:srgbClr val="3C3C3C"/>
+          </a:solidFill>
+          <a:ln>
+            <a:noFill/>
+          </a:ln>
+        </p:spPr>
+        <p:style>
+          <a:lnRef idx="1">
+            <a:schemeClr val="accent1"/>
+          </a:lnRef>
+          <a:fillRef idx="3">
+            <a:schemeClr val="accent1"/>
+          </a:fillRef>
+          <a:effectRef idx="2">
+            <a:schemeClr val="accent1"/>
+          </a:effectRef>
+          <a:fontRef idx="minor">
+            <a:schemeClr val="lt1"/>
+          </a:fontRef>
+        </p:style>
+        <p:txBody>
+          <a:bodyPr rtlCol="0" anchor="ctr"/>
+          <a:lstStyle/>
+          <a:p>
+            <a:pPr algn="ctr"/>
+          </a:p>
+        </p:txBody>
+      </p:sp>
+      <p:sp>
+        <p:nvSpPr>
+          <p:cNvPr id="31" name="TextBox 30"/>
+          <p:cNvSpPr txBox="1"/>
+          <p:nvPr/>
+        </p:nvSpPr>
+        <p:spPr>
+          <a:xfrm>
+            <a:off x="3794759" y="5925312"/>
+            <a:ext cx="1508760" cy="256032"/>
+          </a:xfrm>
+          <a:prstGeom prst="rect">
+            <a:avLst/>
+          </a:prstGeom>
+          <a:noFill/>
+        </p:spPr>
+        <p:txBody>
+          <a:bodyPr wrap="square">
+            <a:spAutoFit/>
+          </a:bodyPr>
+          <a:lstStyle/>
+          <a:p>
+            <a:pPr algn="ctr"/>
+            <a:r>
+              <a:rPr sz="800" b="1">
+                <a:solidFill>
+                  <a:srgbClr val="FFFFFF"/>
+                </a:solidFill>
+              </a:rPr>
+              <a:t>IAM Least Privilege</a:t>
+            </a:r>
+          </a:p>
+        </p:txBody>
+      </p:sp>
+      <p:sp>
+        <p:nvSpPr>
+          <p:cNvPr id="32" name="Rectangle 31"/>
+          <p:cNvSpPr/>
+          <p:nvPr/>
+        </p:nvSpPr>
+        <p:spPr>
+          <a:xfrm>
+            <a:off x="5486400" y="5897880"/>
+            <a:ext cx="1600200" cy="320040"/>
+          </a:xfrm>
+          <a:prstGeom prst="rect">
+            <a:avLst/>
+          </a:prstGeom>
+          <a:solidFill>
+            <a:srgbClr val="3C3C3C"/>
+          </a:solidFill>
+          <a:ln>
+            <a:noFill/>
+          </a:ln>
+        </p:spPr>
+        <p:style>
+          <a:lnRef idx="1">
+            <a:schemeClr val="accent1"/>
+          </a:lnRef>
+          <a:fillRef idx="3">
+            <a:schemeClr val="accent1"/>
+          </a:fillRef>
+          <a:effectRef idx="2">
+            <a:schemeClr val="accent1"/>
+          </a:effectRef>
+          <a:fontRef idx="minor">
+            <a:schemeClr val="lt1"/>
+          </a:fontRef>
+        </p:style>
+        <p:txBody>
+          <a:bodyPr rtlCol="0" anchor="ctr"/>
+          <a:lstStyle/>
+          <a:p>
+            <a:pPr algn="ctr"/>
+          </a:p>
+        </p:txBody>
+      </p:sp>
+      <p:sp>
+        <p:nvSpPr>
+          <p:cNvPr id="33" name="TextBox 32"/>
+          <p:cNvSpPr txBox="1"/>
+          <p:nvPr/>
+        </p:nvSpPr>
+        <p:spPr>
+          <a:xfrm>
+            <a:off x="5532120" y="5925312"/>
+            <a:ext cx="1508760" cy="256032"/>
+          </a:xfrm>
+          <a:prstGeom prst="rect">
+            <a:avLst/>
+          </a:prstGeom>
+          <a:noFill/>
+        </p:spPr>
+        <p:txBody>
+          <a:bodyPr wrap="square">
+            <a:spAutoFit/>
+          </a:bodyPr>
+          <a:lstStyle/>
+          <a:p>
+            <a:pPr algn="ctr"/>
+            <a:r>
+              <a:rPr sz="800" b="1">
+                <a:solidFill>
+                  <a:srgbClr val="FFFFFF"/>
+                </a:solidFill>
+              </a:rPr>
+              <a:t>S3 Lifecycle Rules</a:t>
+            </a:r>
+          </a:p>
+        </p:txBody>
+      </p:sp>
+      <p:sp>
+        <p:nvSpPr>
+          <p:cNvPr id="34" name="Rectangle 33"/>
+          <p:cNvSpPr/>
+          <p:nvPr/>
+        </p:nvSpPr>
+        <p:spPr>
+          <a:xfrm>
+            <a:off x="7223760" y="5897880"/>
+            <a:ext cx="1600200" cy="320040"/>
+          </a:xfrm>
+          <a:prstGeom prst="rect">
+            <a:avLst/>
+          </a:prstGeom>
+          <a:solidFill>
+            <a:srgbClr val="3C3C3C"/>
+          </a:solidFill>
+          <a:ln>
+            <a:noFill/>
+          </a:ln>
+        </p:spPr>
+        <p:style>
+          <a:lnRef idx="1">
+            <a:schemeClr val="accent1"/>
+          </a:lnRef>
+          <a:fillRef idx="3">
+            <a:schemeClr val="accent1"/>
+          </a:fillRef>
+          <a:effectRef idx="2">
+            <a:schemeClr val="accent1"/>
+          </a:effectRef>
+          <a:fontRef idx="minor">
+            <a:schemeClr val="lt1"/>
+          </a:fontRef>
+        </p:style>
+        <p:txBody>
+          <a:bodyPr rtlCol="0" anchor="ctr"/>
+          <a:lstStyle/>
+          <a:p>
+            <a:pPr algn="ctr"/>
+          </a:p>
+        </p:txBody>
+      </p:sp>
+      <p:sp>
+        <p:nvSpPr>
+          <p:cNvPr id="35" name="TextBox 34"/>
+          <p:cNvSpPr txBox="1"/>
+          <p:nvPr/>
+        </p:nvSpPr>
+        <p:spPr>
+          <a:xfrm>
+            <a:off x="7269480" y="5925312"/>
+            <a:ext cx="1508760" cy="256032"/>
+          </a:xfrm>
+          <a:prstGeom prst="rect">
+            <a:avLst/>
+          </a:prstGeom>
+          <a:noFill/>
+        </p:spPr>
+        <p:txBody>
+          <a:bodyPr wrap="square">
+            <a:spAutoFit/>
+          </a:bodyPr>
+          <a:lstStyle/>
+          <a:p>
+            <a:pPr algn="ctr"/>
+            <a:r>
+              <a:rPr sz="800" b="1">
+                <a:solidFill>
+                  <a:srgbClr val="FFFFFF"/>
+                </a:solidFill>
+              </a:rPr>
+              <a:t>VPC-ready IAM</a:t>
+            </a:r>
+          </a:p>
+        </p:txBody>
+      </p:sp>
+    </p:spTree>
+  </p:cSld>
+  <p:clrMapOvr>
+    <a:masterClrMapping/>
+  </p:clrMapOvr>
+</p:sld>
+</file>
+
+<file path=ppt/slides/slide14.xml><?xml version="1.0" encoding="utf-8"?>
+<p:sld xmlns:a="http://schemas.openxmlformats.org/drawingml/2006/main" xmlns:p="http://schemas.openxmlformats.org/presentationml/2006/main" xmlns:r="http://schemas.openxmlformats.org/officeDocument/2006/relationships">
+  <p:cSld>
+    <p:spTree>
+      <p:nvGrpSpPr>
+        <p:cNvPr id="1" name=""/>
+        <p:cNvGrpSpPr/>
+        <p:nvPr/>
+      </p:nvGrpSpPr>
+      <p:grpSpPr/>
+      <p:sp>
+        <p:nvSpPr>
+          <p:cNvPr id="2" name="Rectangle 1"/>
+          <p:cNvSpPr/>
+          <p:nvPr/>
+        </p:nvSpPr>
+        <p:spPr>
+          <a:xfrm>
+            <a:off x="0" y="0"/>
+            <a:ext cx="9144000" cy="1005840"/>
+          </a:xfrm>
+          <a:prstGeom prst="rect">
+            <a:avLst/>
+          </a:prstGeom>
+          <a:solidFill>
+            <a:srgbClr val="EB1C24"/>
+          </a:solidFill>
+          <a:ln>
+            <a:noFill/>
+          </a:ln>
+        </p:spPr>
+        <p:style>
+          <a:lnRef idx="1">
+            <a:schemeClr val="accent1"/>
+          </a:lnRef>
+          <a:fillRef idx="3">
+            <a:schemeClr val="accent1"/>
+          </a:fillRef>
+          <a:effectRef idx="2">
+            <a:schemeClr val="accent1"/>
+          </a:effectRef>
+          <a:fontRef idx="minor">
+            <a:schemeClr val="lt1"/>
+          </a:fontRef>
+        </p:style>
+        <p:txBody>
+          <a:bodyPr rtlCol="0" anchor="ctr"/>
+          <a:lstStyle/>
+          <a:p>
+            <a:pPr algn="ctr"/>
+          </a:p>
+        </p:txBody>
+      </p:sp>
+      <p:sp>
+        <p:nvSpPr>
+          <p:cNvPr id="3" name="TextBox 2"/>
+          <p:cNvSpPr txBox="1"/>
+          <p:nvPr/>
+        </p:nvSpPr>
+        <p:spPr>
+          <a:xfrm>
+            <a:off x="274320" y="182880"/>
+            <a:ext cx="8595360" cy="731520"/>
+          </a:xfrm>
+          <a:prstGeom prst="rect">
+            <a:avLst/>
+          </a:prstGeom>
+          <a:noFill/>
+        </p:spPr>
+        <p:txBody>
+          <a:bodyPr wrap="square">
+            <a:spAutoFit/>
+          </a:bodyPr>
+          <a:lstStyle/>
+          <a:p>
+            <a:pPr algn="l"/>
+            <a:r>
+              <a:rPr sz="2400" b="1">
+                <a:solidFill>
+                  <a:srgbClr val="FFFFFF"/>
+                </a:solidFill>
+              </a:rPr>
+              <a:t>Security &amp; Encryption</a:t>
+            </a:r>
+          </a:p>
+        </p:txBody>
+      </p:sp>
+      <p:sp>
+        <p:nvSpPr>
+          <p:cNvPr id="4" name="Rectangle 3"/>
+          <p:cNvSpPr/>
+          <p:nvPr/>
+        </p:nvSpPr>
+        <p:spPr>
+          <a:xfrm>
+            <a:off x="0" y="6309360"/>
+            <a:ext cx="9144000" cy="548640"/>
+          </a:xfrm>
+          <a:prstGeom prst="rect">
+            <a:avLst/>
+          </a:prstGeom>
+          <a:solidFill>
+            <a:srgbClr val="3C3C3C"/>
+          </a:solidFill>
+          <a:ln>
+            <a:noFill/>
+          </a:ln>
+        </p:spPr>
+        <p:style>
+          <a:lnRef idx="1">
+            <a:schemeClr val="accent1"/>
+          </a:lnRef>
+          <a:fillRef idx="3">
+            <a:schemeClr val="accent1"/>
+          </a:fillRef>
+          <a:effectRef idx="2">
+            <a:schemeClr val="accent1"/>
+          </a:effectRef>
+          <a:fontRef idx="minor">
+            <a:schemeClr val="lt1"/>
+          </a:fontRef>
+        </p:style>
+        <p:txBody>
+          <a:bodyPr rtlCol="0" anchor="ctr"/>
+          <a:lstStyle/>
+          <a:p>
+            <a:pPr algn="ctr"/>
+          </a:p>
+        </p:txBody>
+      </p:sp>
+      <p:sp>
+        <p:nvSpPr>
+          <p:cNvPr id="5" name="TextBox 4"/>
+          <p:cNvSpPr txBox="1"/>
+          <p:nvPr/>
+        </p:nvSpPr>
+        <p:spPr>
+          <a:xfrm>
+            <a:off x="274320" y="6355080"/>
+            <a:ext cx="8595360" cy="365760"/>
+          </a:xfrm>
+          <a:prstGeom prst="rect">
+            <a:avLst/>
+          </a:prstGeom>
+          <a:noFill/>
+        </p:spPr>
+        <p:txBody>
+          <a:bodyPr wrap="square">
+            <a:spAutoFit/>
+          </a:bodyPr>
+          <a:lstStyle/>
+          <a:p>
+            <a:pPr algn="ctr"/>
+            <a:r>
+              <a:rPr sz="900" b="0">
+                <a:solidFill>
+                  <a:srgbClr val="FFFFFF"/>
+                </a:solidFill>
+              </a:rPr>
+              <a:t>Adobe Data Engineer Assessment  |  Search Keyword Performance Analyzer  |  Security</a:t>
+            </a:r>
+          </a:p>
+        </p:txBody>
+      </p:sp>
+      <p:sp>
+        <p:nvSpPr>
+          <p:cNvPr id="6" name="Rectangle 5"/>
+          <p:cNvSpPr/>
+          <p:nvPr/>
+        </p:nvSpPr>
+        <p:spPr>
+          <a:xfrm>
+            <a:off x="274320" y="1143000"/>
+            <a:ext cx="8595360" cy="475488"/>
+          </a:xfrm>
+          <a:prstGeom prst="rect">
+            <a:avLst/>
+          </a:prstGeom>
+          <a:solidFill>
+            <a:srgbClr val="F4F4F4"/>
+          </a:solidFill>
+          <a:ln>
+            <a:noFill/>
+          </a:ln>
+        </p:spPr>
+        <p:style>
+          <a:lnRef idx="1">
+            <a:schemeClr val="accent1"/>
+          </a:lnRef>
+          <a:fillRef idx="3">
+            <a:schemeClr val="accent1"/>
+          </a:fillRef>
+          <a:effectRef idx="2">
+            <a:schemeClr val="accent1"/>
+          </a:effectRef>
+          <a:fontRef idx="minor">
+            <a:schemeClr val="lt1"/>
+          </a:fontRef>
+        </p:style>
+        <p:txBody>
+          <a:bodyPr rtlCol="0" anchor="ctr"/>
+          <a:lstStyle/>
+          <a:p>
+            <a:pPr algn="ctr"/>
+          </a:p>
+        </p:txBody>
+      </p:sp>
+      <p:sp>
+        <p:nvSpPr>
+          <p:cNvPr id="7" name="TextBox 6"/>
+          <p:cNvSpPr txBox="1"/>
+          <p:nvPr/>
+        </p:nvSpPr>
+        <p:spPr>
+          <a:xfrm>
+            <a:off x="365760" y="1179576"/>
+            <a:ext cx="2286000" cy="402336"/>
+          </a:xfrm>
+          <a:prstGeom prst="rect">
+            <a:avLst/>
+          </a:prstGeom>
+          <a:noFill/>
+        </p:spPr>
+        <p:txBody>
+          <a:bodyPr wrap="square">
+            <a:spAutoFit/>
+          </a:bodyPr>
+          <a:lstStyle/>
+          <a:p>
+            <a:pPr algn="l"/>
+            <a:r>
+              <a:rPr sz="900" b="1">
+                <a:solidFill>
+                  <a:srgbClr val="EB1C24"/>
+                </a:solidFill>
+              </a:rPr>
+              <a:t>✓  S3 Encryption</a:t>
+            </a:r>
+          </a:p>
+        </p:txBody>
+      </p:sp>
+      <p:sp>
+        <p:nvSpPr>
+          <p:cNvPr id="8" name="TextBox 7"/>
+          <p:cNvSpPr txBox="1"/>
+          <p:nvPr/>
+        </p:nvSpPr>
+        <p:spPr>
+          <a:xfrm>
+            <a:off x="2743200" y="1216152"/>
+            <a:ext cx="6035040" cy="365760"/>
+          </a:xfrm>
+          <a:prstGeom prst="rect">
+            <a:avLst/>
+          </a:prstGeom>
+          <a:noFill/>
+        </p:spPr>
+        <p:txBody>
+          <a:bodyPr wrap="square">
+            <a:spAutoFit/>
+          </a:bodyPr>
+          <a:lstStyle/>
+          <a:p>
+            <a:pPr algn="l"/>
+            <a:r>
+              <a:rPr sz="900" b="0">
+                <a:solidFill>
+                  <a:srgbClr val="3C3C3C"/>
+                </a:solidFill>
+              </a:rPr>
+              <a:t>SSE-KMS with customer-managed key. Bucket key enabled — reduces KMS API calls by ~99%.</a:t>
+            </a:r>
+          </a:p>
+        </p:txBody>
+      </p:sp>
+      <p:sp>
+        <p:nvSpPr>
+          <p:cNvPr id="9" name="Rectangle 8"/>
+          <p:cNvSpPr/>
+          <p:nvPr/>
+        </p:nvSpPr>
+        <p:spPr>
+          <a:xfrm>
+            <a:off x="274320" y="1655064"/>
+            <a:ext cx="8595360" cy="475488"/>
+          </a:xfrm>
+          <a:prstGeom prst="rect">
+            <a:avLst/>
+          </a:prstGeom>
+          <a:solidFill>
+            <a:srgbClr val="FFFFFF"/>
+          </a:solidFill>
+          <a:ln>
+            <a:noFill/>
+          </a:ln>
+        </p:spPr>
+        <p:style>
+          <a:lnRef idx="1">
+            <a:schemeClr val="accent1"/>
+          </a:lnRef>
+          <a:fillRef idx="3">
+            <a:schemeClr val="accent1"/>
+          </a:fillRef>
+          <a:effectRef idx="2">
+            <a:schemeClr val="accent1"/>
+          </a:effectRef>
+          <a:fontRef idx="minor">
+            <a:schemeClr val="lt1"/>
+          </a:fontRef>
+        </p:style>
+        <p:txBody>
+          <a:bodyPr rtlCol="0" anchor="ctr"/>
+          <a:lstStyle/>
+          <a:p>
+            <a:pPr algn="ctr"/>
+          </a:p>
+        </p:txBody>
+      </p:sp>
+      <p:sp>
+        <p:nvSpPr>
+          <p:cNvPr id="10" name="TextBox 9"/>
+          <p:cNvSpPr txBox="1"/>
+          <p:nvPr/>
+        </p:nvSpPr>
+        <p:spPr>
+          <a:xfrm>
+            <a:off x="365760" y="1691640"/>
+            <a:ext cx="2286000" cy="402336"/>
+          </a:xfrm>
+          <a:prstGeom prst="rect">
+            <a:avLst/>
+          </a:prstGeom>
+          <a:noFill/>
+        </p:spPr>
+        <p:txBody>
+          <a:bodyPr wrap="square">
+            <a:spAutoFit/>
+          </a:bodyPr>
+          <a:lstStyle/>
+          <a:p>
+            <a:pPr algn="l"/>
+            <a:r>
+              <a:rPr sz="900" b="1">
+                <a:solidFill>
+                  <a:srgbClr val="EB1C24"/>
+                </a:solidFill>
+              </a:rPr>
+              <a:t>✓  Glue Data Catalog</a:t>
+            </a:r>
+          </a:p>
+        </p:txBody>
+      </p:sp>
+      <p:sp>
+        <p:nvSpPr>
+          <p:cNvPr id="11" name="TextBox 10"/>
+          <p:cNvSpPr txBox="1"/>
+          <p:nvPr/>
+        </p:nvSpPr>
+        <p:spPr>
+          <a:xfrm>
+            <a:off x="2743200" y="1728216"/>
+            <a:ext cx="6035040" cy="365760"/>
+          </a:xfrm>
+          <a:prstGeom prst="rect">
+            <a:avLst/>
+          </a:prstGeom>
+          <a:noFill/>
+        </p:spPr>
+        <p:txBody>
+          <a:bodyPr wrap="square">
+            <a:spAutoFit/>
+          </a:bodyPr>
+          <a:lstStyle/>
+          <a:p>
+            <a:pPr algn="l"/>
+            <a:r>
+              <a:rPr sz="900" b="0">
+                <a:solidFill>
+                  <a:srgbClr val="3C3C3C"/>
+                </a:solidFill>
+              </a:rPr>
+              <a:t>Catalog metadata encrypted with same KMS key. Connection passwords encrypted at rest.</a:t>
+            </a:r>
+          </a:p>
+        </p:txBody>
+      </p:sp>
+      <p:sp>
+        <p:nvSpPr>
+          <p:cNvPr id="12" name="Rectangle 11"/>
+          <p:cNvSpPr/>
+          <p:nvPr/>
+        </p:nvSpPr>
+        <p:spPr>
+          <a:xfrm>
+            <a:off x="274320" y="2167128"/>
+            <a:ext cx="8595360" cy="475488"/>
+          </a:xfrm>
+          <a:prstGeom prst="rect">
+            <a:avLst/>
+          </a:prstGeom>
+          <a:solidFill>
+            <a:srgbClr val="F4F4F4"/>
+          </a:solidFill>
+          <a:ln>
+            <a:noFill/>
+          </a:ln>
+        </p:spPr>
+        <p:style>
+          <a:lnRef idx="1">
+            <a:schemeClr val="accent1"/>
+          </a:lnRef>
+          <a:fillRef idx="3">
+            <a:schemeClr val="accent1"/>
+          </a:fillRef>
+          <a:effectRef idx="2">
+            <a:schemeClr val="accent1"/>
+          </a:effectRef>
+          <a:fontRef idx="minor">
+            <a:schemeClr val="lt1"/>
+          </a:fontRef>
+        </p:style>
+        <p:txBody>
+          <a:bodyPr rtlCol="0" anchor="ctr"/>
+          <a:lstStyle/>
+          <a:p>
+            <a:pPr algn="ctr"/>
+          </a:p>
+        </p:txBody>
+      </p:sp>
+      <p:sp>
+        <p:nvSpPr>
+          <p:cNvPr id="13" name="TextBox 12"/>
+          <p:cNvSpPr txBox="1"/>
+          <p:nvPr/>
+        </p:nvSpPr>
+        <p:spPr>
+          <a:xfrm>
+            <a:off x="365760" y="2203704"/>
+            <a:ext cx="2286000" cy="402336"/>
+          </a:xfrm>
+          <a:prstGeom prst="rect">
+            <a:avLst/>
+          </a:prstGeom>
+          <a:noFill/>
+        </p:spPr>
+        <p:txBody>
+          <a:bodyPr wrap="square">
+            <a:spAutoFit/>
+          </a:bodyPr>
+          <a:lstStyle/>
+          <a:p>
+            <a:pPr algn="l"/>
+            <a:r>
+              <a:rPr sz="900" b="1">
+                <a:solidFill>
+                  <a:srgbClr val="EB1C24"/>
+                </a:solidFill>
+              </a:rPr>
+              <a:t>✓  Athena Query Results</a:t>
+            </a:r>
+          </a:p>
+        </p:txBody>
+      </p:sp>
+      <p:sp>
+        <p:nvSpPr>
+          <p:cNvPr id="14" name="TextBox 13"/>
+          <p:cNvSpPr txBox="1"/>
+          <p:nvPr/>
+        </p:nvSpPr>
+        <p:spPr>
+          <a:xfrm>
+            <a:off x="2743200" y="2240280"/>
+            <a:ext cx="6035040" cy="365760"/>
+          </a:xfrm>
+          <a:prstGeom prst="rect">
+            <a:avLst/>
+          </a:prstGeom>
+          <a:noFill/>
+        </p:spPr>
+        <p:txBody>
+          <a:bodyPr wrap="square">
+            <a:spAutoFit/>
+          </a:bodyPr>
+          <a:lstStyle/>
+          <a:p>
+            <a:pPr algn="l"/>
+            <a:r>
+              <a:rPr sz="900" b="0">
+                <a:solidFill>
+                  <a:srgbClr val="3C3C3C"/>
+                </a:solidFill>
+              </a:rPr>
+              <a:t>Output stored in S3 with SSE-KMS encryption. 100 MB per-query scan limit to control costs.</a:t>
+            </a:r>
+          </a:p>
+        </p:txBody>
+      </p:sp>
+      <p:sp>
+        <p:nvSpPr>
+          <p:cNvPr id="15" name="Rectangle 14"/>
+          <p:cNvSpPr/>
+          <p:nvPr/>
+        </p:nvSpPr>
+        <p:spPr>
+          <a:xfrm>
+            <a:off x="274320" y="2679192"/>
+            <a:ext cx="8595360" cy="475488"/>
+          </a:xfrm>
+          <a:prstGeom prst="rect">
+            <a:avLst/>
+          </a:prstGeom>
+          <a:solidFill>
+            <a:srgbClr val="FFFFFF"/>
+          </a:solidFill>
+          <a:ln>
+            <a:noFill/>
+          </a:ln>
+        </p:spPr>
+        <p:style>
+          <a:lnRef idx="1">
+            <a:schemeClr val="accent1"/>
+          </a:lnRef>
+          <a:fillRef idx="3">
+            <a:schemeClr val="accent1"/>
+          </a:fillRef>
+          <a:effectRef idx="2">
+            <a:schemeClr val="accent1"/>
+          </a:effectRef>
+          <a:fontRef idx="minor">
+            <a:schemeClr val="lt1"/>
+          </a:fontRef>
+        </p:style>
+        <p:txBody>
+          <a:bodyPr rtlCol="0" anchor="ctr"/>
+          <a:lstStyle/>
+          <a:p>
+            <a:pPr algn="ctr"/>
+          </a:p>
+        </p:txBody>
+      </p:sp>
+      <p:sp>
+        <p:nvSpPr>
+          <p:cNvPr id="16" name="TextBox 15"/>
+          <p:cNvSpPr txBox="1"/>
+          <p:nvPr/>
+        </p:nvSpPr>
+        <p:spPr>
+          <a:xfrm>
+            <a:off x="365760" y="2715768"/>
+            <a:ext cx="2286000" cy="402336"/>
+          </a:xfrm>
+          <a:prstGeom prst="rect">
+            <a:avLst/>
+          </a:prstGeom>
+          <a:noFill/>
+        </p:spPr>
+        <p:txBody>
+          <a:bodyPr wrap="square">
+            <a:spAutoFit/>
+          </a:bodyPr>
+          <a:lstStyle/>
+          <a:p>
+            <a:pPr algn="l"/>
+            <a:r>
+              <a:rPr sz="900" b="1">
+                <a:solidFill>
+                  <a:srgbClr val="EB1C24"/>
+                </a:solidFill>
+              </a:rPr>
+              <a:t>✓  KMS Key Rotation</a:t>
+            </a:r>
+          </a:p>
+        </p:txBody>
+      </p:sp>
+      <p:sp>
+        <p:nvSpPr>
+          <p:cNvPr id="17" name="TextBox 16"/>
+          <p:cNvSpPr txBox="1"/>
+          <p:nvPr/>
+        </p:nvSpPr>
+        <p:spPr>
+          <a:xfrm>
+            <a:off x="2743200" y="2752344"/>
+            <a:ext cx="6035040" cy="365760"/>
+          </a:xfrm>
+          <a:prstGeom prst="rect">
+            <a:avLst/>
+          </a:prstGeom>
+          <a:noFill/>
+        </p:spPr>
+        <p:txBody>
+          <a:bodyPr wrap="square">
+            <a:spAutoFit/>
+          </a:bodyPr>
+          <a:lstStyle/>
+          <a:p>
+            <a:pPr algn="l"/>
+            <a:r>
+              <a:rPr sz="900" b="0">
+                <a:solidFill>
+                  <a:srgbClr val="3C3C3C"/>
+                </a:solidFill>
+              </a:rPr>
+              <a:t>Automatic annual rotation enabled. 7-day deletion window prevents accidental data loss.</a:t>
+            </a:r>
+          </a:p>
+        </p:txBody>
+      </p:sp>
+      <p:sp>
+        <p:nvSpPr>
+          <p:cNvPr id="18" name="Rectangle 17"/>
+          <p:cNvSpPr/>
+          <p:nvPr/>
+        </p:nvSpPr>
+        <p:spPr>
+          <a:xfrm>
+            <a:off x="274320" y="3191256"/>
+            <a:ext cx="8595360" cy="475488"/>
+          </a:xfrm>
+          <a:prstGeom prst="rect">
+            <a:avLst/>
+          </a:prstGeom>
+          <a:solidFill>
+            <a:srgbClr val="F4F4F4"/>
+          </a:solidFill>
+          <a:ln>
+            <a:noFill/>
+          </a:ln>
+        </p:spPr>
+        <p:style>
+          <a:lnRef idx="1">
+            <a:schemeClr val="accent1"/>
+          </a:lnRef>
+          <a:fillRef idx="3">
+            <a:schemeClr val="accent1"/>
+          </a:fillRef>
+          <a:effectRef idx="2">
+            <a:schemeClr val="accent1"/>
+          </a:effectRef>
+          <a:fontRef idx="minor">
+            <a:schemeClr val="lt1"/>
+          </a:fontRef>
+        </p:style>
+        <p:txBody>
+          <a:bodyPr rtlCol="0" anchor="ctr"/>
+          <a:lstStyle/>
+          <a:p>
+            <a:pPr algn="ctr"/>
+          </a:p>
+        </p:txBody>
+      </p:sp>
+      <p:sp>
+        <p:nvSpPr>
+          <p:cNvPr id="19" name="TextBox 18"/>
+          <p:cNvSpPr txBox="1"/>
+          <p:nvPr/>
+        </p:nvSpPr>
+        <p:spPr>
+          <a:xfrm>
+            <a:off x="365760" y="3227832"/>
+            <a:ext cx="2286000" cy="402336"/>
+          </a:xfrm>
+          <a:prstGeom prst="rect">
+            <a:avLst/>
+          </a:prstGeom>
+          <a:noFill/>
+        </p:spPr>
+        <p:txBody>
+          <a:bodyPr wrap="square">
+            <a:spAutoFit/>
+          </a:bodyPr>
+          <a:lstStyle/>
+          <a:p>
+            <a:pPr algn="l"/>
+            <a:r>
+              <a:rPr sz="900" b="1">
+                <a:solidFill>
+                  <a:srgbClr val="EB1C24"/>
+                </a:solidFill>
+              </a:rPr>
+              <a:t>✓  S3 Public Access</a:t>
+            </a:r>
+          </a:p>
+        </p:txBody>
+      </p:sp>
+      <p:sp>
+        <p:nvSpPr>
+          <p:cNvPr id="20" name="TextBox 19"/>
+          <p:cNvSpPr txBox="1"/>
+          <p:nvPr/>
+        </p:nvSpPr>
+        <p:spPr>
+          <a:xfrm>
+            <a:off x="2743200" y="3264408"/>
+            <a:ext cx="6035040" cy="365760"/>
+          </a:xfrm>
+          <a:prstGeom prst="rect">
+            <a:avLst/>
+          </a:prstGeom>
+          <a:noFill/>
+        </p:spPr>
+        <p:txBody>
+          <a:bodyPr wrap="square">
+            <a:spAutoFit/>
+          </a:bodyPr>
+          <a:lstStyle/>
+          <a:p>
+            <a:pPr algn="l"/>
+            <a:r>
+              <a:rPr sz="900" b="0">
+                <a:solidFill>
+                  <a:srgbClr val="3C3C3C"/>
+                </a:solidFill>
+              </a:rPr>
+              <a:t>All public access fully blocked: ACLs, policies, public buckets — 4/4 flags enabled.</a:t>
+            </a:r>
+          </a:p>
+        </p:txBody>
+      </p:sp>
+      <p:sp>
+        <p:nvSpPr>
+          <p:cNvPr id="21" name="Rectangle 20"/>
+          <p:cNvSpPr/>
+          <p:nvPr/>
+        </p:nvSpPr>
+        <p:spPr>
+          <a:xfrm>
+            <a:off x="274320" y="3703320"/>
+            <a:ext cx="8595360" cy="475488"/>
+          </a:xfrm>
+          <a:prstGeom prst="rect">
+            <a:avLst/>
+          </a:prstGeom>
+          <a:solidFill>
+            <a:srgbClr val="FFFFFF"/>
+          </a:solidFill>
+          <a:ln>
+            <a:noFill/>
+          </a:ln>
+        </p:spPr>
+        <p:style>
+          <a:lnRef idx="1">
+            <a:schemeClr val="accent1"/>
+          </a:lnRef>
+          <a:fillRef idx="3">
+            <a:schemeClr val="accent1"/>
+          </a:fillRef>
+          <a:effectRef idx="2">
+            <a:schemeClr val="accent1"/>
+          </a:effectRef>
+          <a:fontRef idx="minor">
+            <a:schemeClr val="lt1"/>
+          </a:fontRef>
+        </p:style>
+        <p:txBody>
+          <a:bodyPr rtlCol="0" anchor="ctr"/>
+          <a:lstStyle/>
+          <a:p>
+            <a:pPr algn="ctr"/>
+          </a:p>
+        </p:txBody>
+      </p:sp>
+      <p:sp>
+        <p:nvSpPr>
+          <p:cNvPr id="22" name="TextBox 21"/>
+          <p:cNvSpPr txBox="1"/>
+          <p:nvPr/>
+        </p:nvSpPr>
+        <p:spPr>
+          <a:xfrm>
+            <a:off x="365760" y="3739896"/>
+            <a:ext cx="2286000" cy="402336"/>
+          </a:xfrm>
+          <a:prstGeom prst="rect">
+            <a:avLst/>
+          </a:prstGeom>
+          <a:noFill/>
+        </p:spPr>
+        <p:txBody>
+          <a:bodyPr wrap="square">
+            <a:spAutoFit/>
+          </a:bodyPr>
+          <a:lstStyle/>
+          <a:p>
+            <a:pPr algn="l"/>
+            <a:r>
+              <a:rPr sz="900" b="1">
+                <a:solidFill>
+                  <a:srgbClr val="EB1C24"/>
+                </a:solidFill>
+              </a:rPr>
+              <a:t>✓  IAM Least Privilege</a:t>
+            </a:r>
+          </a:p>
+        </p:txBody>
+      </p:sp>
+      <p:sp>
+        <p:nvSpPr>
+          <p:cNvPr id="23" name="TextBox 22"/>
+          <p:cNvSpPr txBox="1"/>
+          <p:nvPr/>
+        </p:nvSpPr>
+        <p:spPr>
+          <a:xfrm>
+            <a:off x="2743200" y="3776472"/>
+            <a:ext cx="6035040" cy="365760"/>
+          </a:xfrm>
+          <a:prstGeom prst="rect">
+            <a:avLst/>
+          </a:prstGeom>
+          <a:noFill/>
+        </p:spPr>
+        <p:txBody>
+          <a:bodyPr wrap="square">
+            <a:spAutoFit/>
+          </a:bodyPr>
+          <a:lstStyle/>
+          <a:p>
+            <a:pPr algn="l"/>
+            <a:r>
+              <a:rPr sz="900" b="0">
+                <a:solidFill>
+                  <a:srgbClr val="3C3C3C"/>
+                </a:solidFill>
+              </a:rPr>
+              <a:t>Lambda role has only: s3:Get/Put/Copy on bucket, kms:Decrypt/GenerateDataKey, logs:*.</a:t>
+            </a:r>
+          </a:p>
+        </p:txBody>
+      </p:sp>
+      <p:sp>
+        <p:nvSpPr>
+          <p:cNvPr id="24" name="Rectangle 23"/>
+          <p:cNvSpPr/>
+          <p:nvPr/>
+        </p:nvSpPr>
+        <p:spPr>
+          <a:xfrm>
+            <a:off x="274320" y="4215384"/>
+            <a:ext cx="8595360" cy="475488"/>
+          </a:xfrm>
+          <a:prstGeom prst="rect">
+            <a:avLst/>
+          </a:prstGeom>
+          <a:solidFill>
+            <a:srgbClr val="F4F4F4"/>
+          </a:solidFill>
+          <a:ln>
+            <a:noFill/>
+          </a:ln>
+        </p:spPr>
+        <p:style>
+          <a:lnRef idx="1">
+            <a:schemeClr val="accent1"/>
+          </a:lnRef>
+          <a:fillRef idx="3">
+            <a:schemeClr val="accent1"/>
+          </a:fillRef>
+          <a:effectRef idx="2">
+            <a:schemeClr val="accent1"/>
+          </a:effectRef>
+          <a:fontRef idx="minor">
+            <a:schemeClr val="lt1"/>
+          </a:fontRef>
+        </p:style>
+        <p:txBody>
+          <a:bodyPr rtlCol="0" anchor="ctr"/>
+          <a:lstStyle/>
+          <a:p>
+            <a:pPr algn="ctr"/>
+          </a:p>
+        </p:txBody>
+      </p:sp>
+      <p:sp>
+        <p:nvSpPr>
+          <p:cNvPr id="25" name="TextBox 24"/>
+          <p:cNvSpPr txBox="1"/>
+          <p:nvPr/>
+        </p:nvSpPr>
+        <p:spPr>
+          <a:xfrm>
+            <a:off x="365760" y="4251960"/>
+            <a:ext cx="2286000" cy="402336"/>
+          </a:xfrm>
+          <a:prstGeom prst="rect">
+            <a:avLst/>
+          </a:prstGeom>
+          <a:noFill/>
+        </p:spPr>
+        <p:txBody>
+          <a:bodyPr wrap="square">
+            <a:spAutoFit/>
+          </a:bodyPr>
+          <a:lstStyle/>
+          <a:p>
+            <a:pPr algn="l"/>
+            <a:r>
+              <a:rPr sz="900" b="1">
+                <a:solidFill>
+                  <a:srgbClr val="EB1C24"/>
+                </a:solidFill>
+              </a:rPr>
+              <a:t>✓  GitHub Secrets</a:t>
+            </a:r>
+          </a:p>
+        </p:txBody>
+      </p:sp>
+      <p:sp>
+        <p:nvSpPr>
+          <p:cNvPr id="26" name="TextBox 25"/>
+          <p:cNvSpPr txBox="1"/>
+          <p:nvPr/>
+        </p:nvSpPr>
+        <p:spPr>
+          <a:xfrm>
+            <a:off x="2743200" y="4288536"/>
+            <a:ext cx="6035040" cy="365760"/>
+          </a:xfrm>
+          <a:prstGeom prst="rect">
+            <a:avLst/>
+          </a:prstGeom>
+          <a:noFill/>
+        </p:spPr>
+        <p:txBody>
+          <a:bodyPr wrap="square">
+            <a:spAutoFit/>
+          </a:bodyPr>
+          <a:lstStyle/>
+          <a:p>
+            <a:pPr algn="l"/>
+            <a:r>
+              <a:rPr sz="900" b="0">
+                <a:solidFill>
+                  <a:srgbClr val="3C3C3C"/>
+                </a:solidFill>
+              </a:rPr>
+              <a:t>AWS credentials stored as encrypted GitHub Secrets. Never hardcoded in source or config.</a:t>
+            </a:r>
+          </a:p>
+        </p:txBody>
+      </p:sp>
+      <p:sp>
+        <p:nvSpPr>
+          <p:cNvPr id="27" name="Rectangle 26"/>
+          <p:cNvSpPr/>
+          <p:nvPr/>
+        </p:nvSpPr>
+        <p:spPr>
+          <a:xfrm>
+            <a:off x="274320" y="4727448"/>
+            <a:ext cx="8595360" cy="475488"/>
+          </a:xfrm>
+          <a:prstGeom prst="rect">
+            <a:avLst/>
+          </a:prstGeom>
+          <a:solidFill>
+            <a:srgbClr val="FFFFFF"/>
+          </a:solidFill>
+          <a:ln>
+            <a:noFill/>
+          </a:ln>
+        </p:spPr>
+        <p:style>
+          <a:lnRef idx="1">
+            <a:schemeClr val="accent1"/>
+          </a:lnRef>
+          <a:fillRef idx="3">
+            <a:schemeClr val="accent1"/>
+          </a:fillRef>
+          <a:effectRef idx="2">
+            <a:schemeClr val="accent1"/>
+          </a:effectRef>
+          <a:fontRef idx="minor">
+            <a:schemeClr val="lt1"/>
+          </a:fontRef>
+        </p:style>
+        <p:txBody>
+          <a:bodyPr rtlCol="0" anchor="ctr"/>
+          <a:lstStyle/>
+          <a:p>
+            <a:pPr algn="ctr"/>
+          </a:p>
+        </p:txBody>
+      </p:sp>
+      <p:sp>
+        <p:nvSpPr>
+          <p:cNvPr id="28" name="TextBox 27"/>
+          <p:cNvSpPr txBox="1"/>
+          <p:nvPr/>
+        </p:nvSpPr>
+        <p:spPr>
+          <a:xfrm>
+            <a:off x="365760" y="4764024"/>
+            <a:ext cx="2286000" cy="402336"/>
+          </a:xfrm>
+          <a:prstGeom prst="rect">
+            <a:avLst/>
+          </a:prstGeom>
+          <a:noFill/>
+        </p:spPr>
+        <p:txBody>
+          <a:bodyPr wrap="square">
+            <a:spAutoFit/>
+          </a:bodyPr>
+          <a:lstStyle/>
+          <a:p>
+            <a:pPr algn="l"/>
+            <a:r>
+              <a:rPr sz="900" b="1">
+                <a:solidFill>
+                  <a:srgbClr val="EB1C24"/>
+                </a:solidFill>
+              </a:rPr>
+              <a:t>✓  Branch Protection</a:t>
+            </a:r>
+          </a:p>
+        </p:txBody>
+      </p:sp>
+      <p:sp>
+        <p:nvSpPr>
+          <p:cNvPr id="29" name="TextBox 28"/>
+          <p:cNvSpPr txBox="1"/>
+          <p:nvPr/>
+        </p:nvSpPr>
+        <p:spPr>
+          <a:xfrm>
+            <a:off x="2743200" y="4800600"/>
+            <a:ext cx="6035040" cy="365760"/>
+          </a:xfrm>
+          <a:prstGeom prst="rect">
+            <a:avLst/>
+          </a:prstGeom>
+          <a:noFill/>
+        </p:spPr>
+        <p:txBody>
+          <a:bodyPr wrap="square">
+            <a:spAutoFit/>
+          </a:bodyPr>
+          <a:lstStyle/>
+          <a:p>
+            <a:pPr algn="l"/>
+            <a:r>
+              <a:rPr sz="900" b="0">
+                <a:solidFill>
+                  <a:srgbClr val="3C3C3C"/>
+                </a:solidFill>
+              </a:rPr>
+              <a:t>Direct push to main blocked. PRs require 1 approval + passing CI before merge.</a:t>
+            </a:r>
+          </a:p>
+        </p:txBody>
+      </p:sp>
+      <p:sp>
+        <p:nvSpPr>
+          <p:cNvPr id="30" name="Rectangle 29"/>
+          <p:cNvSpPr/>
+          <p:nvPr/>
+        </p:nvSpPr>
+        <p:spPr>
+          <a:xfrm>
+            <a:off x="274320" y="5239512"/>
+            <a:ext cx="8595360" cy="475488"/>
+          </a:xfrm>
+          <a:prstGeom prst="rect">
+            <a:avLst/>
+          </a:prstGeom>
+          <a:solidFill>
+            <a:srgbClr val="F4F4F4"/>
+          </a:solidFill>
+          <a:ln>
+            <a:noFill/>
+          </a:ln>
+        </p:spPr>
+        <p:style>
+          <a:lnRef idx="1">
+            <a:schemeClr val="accent1"/>
+          </a:lnRef>
+          <a:fillRef idx="3">
+            <a:schemeClr val="accent1"/>
+          </a:fillRef>
+          <a:effectRef idx="2">
+            <a:schemeClr val="accent1"/>
+          </a:effectRef>
+          <a:fontRef idx="minor">
+            <a:schemeClr val="lt1"/>
+          </a:fontRef>
+        </p:style>
+        <p:txBody>
+          <a:bodyPr rtlCol="0" anchor="ctr"/>
+          <a:lstStyle/>
+          <a:p>
+            <a:pPr algn="ctr"/>
+          </a:p>
+        </p:txBody>
+      </p:sp>
+      <p:sp>
+        <p:nvSpPr>
+          <p:cNvPr id="31" name="TextBox 30"/>
+          <p:cNvSpPr txBox="1"/>
+          <p:nvPr/>
+        </p:nvSpPr>
+        <p:spPr>
+          <a:xfrm>
+            <a:off x="365760" y="5276088"/>
+            <a:ext cx="2286000" cy="402336"/>
+          </a:xfrm>
+          <a:prstGeom prst="rect">
+            <a:avLst/>
+          </a:prstGeom>
+          <a:noFill/>
+        </p:spPr>
+        <p:txBody>
+          <a:bodyPr wrap="square">
+            <a:spAutoFit/>
+          </a:bodyPr>
+          <a:lstStyle/>
+          <a:p>
+            <a:pPr algn="l"/>
+            <a:r>
+              <a:rPr sz="900" b="1">
+                <a:solidFill>
+                  <a:srgbClr val="EB1C24"/>
+                </a:solidFill>
+              </a:rPr>
+              <a:t>✓  No External Dependencies</a:t>
+            </a:r>
+          </a:p>
+        </p:txBody>
+      </p:sp>
+      <p:sp>
+        <p:nvSpPr>
+          <p:cNvPr id="32" name="TextBox 31"/>
+          <p:cNvSpPr txBox="1"/>
+          <p:nvPr/>
+        </p:nvSpPr>
+        <p:spPr>
+          <a:xfrm>
+            <a:off x="2743200" y="5312664"/>
+            <a:ext cx="6035040" cy="365760"/>
+          </a:xfrm>
+          <a:prstGeom prst="rect">
+            <a:avLst/>
+          </a:prstGeom>
+          <a:noFill/>
+        </p:spPr>
+        <p:txBody>
+          <a:bodyPr wrap="square">
+            <a:spAutoFit/>
+          </a:bodyPr>
+          <a:lstStyle/>
+          <a:p>
+            <a:pPr algn="l"/>
+            <a:r>
+              <a:rPr sz="900" b="0">
+                <a:solidFill>
+                  <a:srgbClr val="3C3C3C"/>
+                </a:solidFill>
+              </a:rPr>
+              <a:t>Python standard library only. Zero third-party packages = zero supply chain risk.</a:t>
+            </a:r>
+          </a:p>
+        </p:txBody>
+      </p:sp>
+    </p:spTree>
+  </p:cSld>
+  <p:clrMapOvr>
+    <a:masterClrMapping/>
+  </p:clrMapOvr>
+</p:sld>
+</file>
+
+<file path=ppt/slides/slide15.xml><?xml version="1.0" encoding="utf-8"?>
+<p:sld xmlns:a="http://schemas.openxmlformats.org/drawingml/2006/main" xmlns:p="http://schemas.openxmlformats.org/presentationml/2006/main" xmlns:r="http://schemas.openxmlformats.org/officeDocument/2006/relationships">
+  <p:cSld>
+    <p:spTree>
+      <p:nvGrpSpPr>
+        <p:cNvPr id="1" name=""/>
+        <p:cNvGrpSpPr/>
+        <p:nvPr/>
+      </p:nvGrpSpPr>
+      <p:grpSpPr/>
+      <p:sp>
+        <p:nvSpPr>
+          <p:cNvPr id="2" name="Rectangle 1"/>
+          <p:cNvSpPr/>
+          <p:nvPr/>
+        </p:nvSpPr>
+        <p:spPr>
+          <a:xfrm>
+            <a:off x="0" y="0"/>
+            <a:ext cx="9144000" cy="1005840"/>
+          </a:xfrm>
+          <a:prstGeom prst="rect">
+            <a:avLst/>
+          </a:prstGeom>
+          <a:solidFill>
+            <a:srgbClr val="EB1C24"/>
+          </a:solidFill>
+          <a:ln>
+            <a:noFill/>
+          </a:ln>
+        </p:spPr>
+        <p:style>
+          <a:lnRef idx="1">
+            <a:schemeClr val="accent1"/>
+          </a:lnRef>
+          <a:fillRef idx="3">
+            <a:schemeClr val="accent1"/>
+          </a:fillRef>
+          <a:effectRef idx="2">
+            <a:schemeClr val="accent1"/>
+          </a:effectRef>
+          <a:fontRef idx="minor">
+            <a:schemeClr val="lt1"/>
+          </a:fontRef>
+        </p:style>
+        <p:txBody>
+          <a:bodyPr rtlCol="0" anchor="ctr"/>
+          <a:lstStyle/>
+          <a:p>
+            <a:pPr algn="ctr"/>
+          </a:p>
+        </p:txBody>
+      </p:sp>
+      <p:sp>
+        <p:nvSpPr>
+          <p:cNvPr id="3" name="TextBox 2"/>
+          <p:cNvSpPr txBox="1"/>
+          <p:nvPr/>
+        </p:nvSpPr>
+        <p:spPr>
+          <a:xfrm>
+            <a:off x="274320" y="182880"/>
+            <a:ext cx="8595360" cy="731520"/>
+          </a:xfrm>
+          <a:prstGeom prst="rect">
+            <a:avLst/>
+          </a:prstGeom>
+          <a:noFill/>
+        </p:spPr>
+        <p:txBody>
+          <a:bodyPr wrap="square">
+            <a:spAutoFit/>
+          </a:bodyPr>
+          <a:lstStyle/>
+          <a:p>
+            <a:pPr algn="l"/>
+            <a:r>
+              <a:rPr sz="2400" b="1">
+                <a:solidFill>
+                  <a:srgbClr val="FFFFFF"/>
+                </a:solidFill>
+              </a:rPr>
+              <a:t>Branch Protection &amp; Git Workflow</a:t>
+            </a:r>
+          </a:p>
+        </p:txBody>
+      </p:sp>
+      <p:sp>
+        <p:nvSpPr>
+          <p:cNvPr id="4" name="Rectangle 3"/>
+          <p:cNvSpPr/>
+          <p:nvPr/>
+        </p:nvSpPr>
+        <p:spPr>
+          <a:xfrm>
+            <a:off x="0" y="6309360"/>
+            <a:ext cx="9144000" cy="548640"/>
+          </a:xfrm>
+          <a:prstGeom prst="rect">
+            <a:avLst/>
+          </a:prstGeom>
+          <a:solidFill>
+            <a:srgbClr val="3C3C3C"/>
+          </a:solidFill>
+          <a:ln>
+            <a:noFill/>
+          </a:ln>
+        </p:spPr>
+        <p:style>
+          <a:lnRef idx="1">
+            <a:schemeClr val="accent1"/>
+          </a:lnRef>
+          <a:fillRef idx="3">
+            <a:schemeClr val="accent1"/>
+          </a:fillRef>
+          <a:effectRef idx="2">
+            <a:schemeClr val="accent1"/>
+          </a:effectRef>
+          <a:fontRef idx="minor">
+            <a:schemeClr val="lt1"/>
+          </a:fontRef>
+        </p:style>
+        <p:txBody>
+          <a:bodyPr rtlCol="0" anchor="ctr"/>
+          <a:lstStyle/>
+          <a:p>
+            <a:pPr algn="ctr"/>
+          </a:p>
+        </p:txBody>
+      </p:sp>
+      <p:sp>
+        <p:nvSpPr>
+          <p:cNvPr id="5" name="TextBox 4"/>
+          <p:cNvSpPr txBox="1"/>
+          <p:nvPr/>
+        </p:nvSpPr>
+        <p:spPr>
+          <a:xfrm>
+            <a:off x="274320" y="6355080"/>
+            <a:ext cx="8595360" cy="365760"/>
+          </a:xfrm>
+          <a:prstGeom prst="rect">
+            <a:avLst/>
+          </a:prstGeom>
+          <a:noFill/>
+        </p:spPr>
+        <p:txBody>
+          <a:bodyPr wrap="square">
+            <a:spAutoFit/>
+          </a:bodyPr>
+          <a:lstStyle/>
+          <a:p>
+            <a:pPr algn="ctr"/>
+            <a:r>
+              <a:rPr sz="900" b="0">
+                <a:solidFill>
+                  <a:srgbClr val="FFFFFF"/>
+                </a:solidFill>
+              </a:rPr>
+              <a:t>Adobe Data Engineer Assessment  |  Search Keyword Performance Analyzer  |  Git Workflow</a:t>
+            </a:r>
+          </a:p>
+        </p:txBody>
+      </p:sp>
+      <p:sp>
+        <p:nvSpPr>
+          <p:cNvPr id="6" name="TextBox 5"/>
+          <p:cNvSpPr txBox="1"/>
+          <p:nvPr/>
+        </p:nvSpPr>
+        <p:spPr>
+          <a:xfrm>
+            <a:off x="274320" y="1143000"/>
+            <a:ext cx="4114800" cy="320040"/>
+          </a:xfrm>
+          <a:prstGeom prst="rect">
+            <a:avLst/>
+          </a:prstGeom>
+          <a:noFill/>
+        </p:spPr>
+        <p:txBody>
+          <a:bodyPr wrap="square">
+            <a:spAutoFit/>
+          </a:bodyPr>
+          <a:lstStyle/>
+          <a:p>
+            <a:pPr algn="l"/>
+            <a:r>
+              <a:rPr sz="1300" b="1">
+                <a:solidFill>
+                  <a:srgbClr val="3C3C3C"/>
+                </a:solidFill>
+              </a:rPr>
+              <a:t>Developer Workflow</a:t>
+            </a:r>
+          </a:p>
+        </p:txBody>
+      </p:sp>
+      <p:sp>
+        <p:nvSpPr>
+          <p:cNvPr id="7" name="TextBox 6"/>
+          <p:cNvSpPr txBox="1"/>
+          <p:nvPr/>
+        </p:nvSpPr>
+        <p:spPr>
+          <a:xfrm>
+            <a:off x="365760" y="1554480"/>
+            <a:ext cx="4023360" cy="320040"/>
+          </a:xfrm>
+          <a:prstGeom prst="rect">
+            <a:avLst/>
+          </a:prstGeom>
+          <a:noFill/>
+        </p:spPr>
+        <p:txBody>
+          <a:bodyPr wrap="square">
+            <a:spAutoFit/>
+          </a:bodyPr>
+          <a:lstStyle/>
+          <a:p>
+            <a:pPr algn="l"/>
+            <a:r>
+              <a:rPr sz="900" b="0">
+                <a:solidFill>
+                  <a:srgbClr val="3C3C3C"/>
+                </a:solidFill>
+              </a:rPr>
+              <a:t>1.  git checkout main &amp;&amp; git pull</a:t>
+            </a:r>
+          </a:p>
+        </p:txBody>
+      </p:sp>
+      <p:sp>
+        <p:nvSpPr>
+          <p:cNvPr id="8" name="TextBox 7"/>
+          <p:cNvSpPr txBox="1"/>
+          <p:nvPr/>
+        </p:nvSpPr>
+        <p:spPr>
+          <a:xfrm>
+            <a:off x="365760" y="1901952"/>
+            <a:ext cx="4023360" cy="320040"/>
+          </a:xfrm>
+          <a:prstGeom prst="rect">
+            <a:avLst/>
+          </a:prstGeom>
+          <a:noFill/>
+        </p:spPr>
+        <p:txBody>
+          <a:bodyPr wrap="square">
+            <a:spAutoFit/>
+          </a:bodyPr>
+          <a:lstStyle/>
+          <a:p>
+            <a:pPr algn="l"/>
+            <a:r>
+              <a:rPr sz="900" b="0">
+                <a:solidFill>
+                  <a:srgbClr val="3C3C3C"/>
+                </a:solidFill>
+              </a:rPr>
+              <a:t>2.  git checkout -b feature/SKA-123-description</a:t>
+            </a:r>
+          </a:p>
+        </p:txBody>
+      </p:sp>
+      <p:sp>
+        <p:nvSpPr>
+          <p:cNvPr id="9" name="TextBox 8"/>
+          <p:cNvSpPr txBox="1"/>
+          <p:nvPr/>
+        </p:nvSpPr>
+        <p:spPr>
+          <a:xfrm>
+            <a:off x="365760" y="2249424"/>
+            <a:ext cx="4023360" cy="320040"/>
+          </a:xfrm>
+          <a:prstGeom prst="rect">
+            <a:avLst/>
+          </a:prstGeom>
+          <a:noFill/>
+        </p:spPr>
+        <p:txBody>
+          <a:bodyPr wrap="square">
+            <a:spAutoFit/>
+          </a:bodyPr>
+          <a:lstStyle/>
+          <a:p>
+            <a:pPr algn="l"/>
+            <a:r>
+              <a:rPr sz="900" b="0">
+                <a:solidFill>
+                  <a:srgbClr val="3C3C3C"/>
+                </a:solidFill>
+              </a:rPr>
+              <a:t>3.  Make changes &amp; commit (Conventional Commits)</a:t>
+            </a:r>
+          </a:p>
+        </p:txBody>
+      </p:sp>
+      <p:sp>
+        <p:nvSpPr>
+          <p:cNvPr id="10" name="TextBox 9"/>
+          <p:cNvSpPr txBox="1"/>
+          <p:nvPr/>
+        </p:nvSpPr>
+        <p:spPr>
+          <a:xfrm>
+            <a:off x="365760" y="2596896"/>
+            <a:ext cx="4023360" cy="320040"/>
+          </a:xfrm>
+          <a:prstGeom prst="rect">
+            <a:avLst/>
+          </a:prstGeom>
+          <a:noFill/>
+        </p:spPr>
+        <p:txBody>
+          <a:bodyPr wrap="square">
+            <a:spAutoFit/>
+          </a:bodyPr>
+          <a:lstStyle/>
+          <a:p>
+            <a:pPr algn="l"/>
+            <a:r>
+              <a:rPr sz="900" b="0">
+                <a:solidFill>
+                  <a:srgbClr val="3C3C3C"/>
+                </a:solidFill>
+              </a:rPr>
+              <a:t>4.  git push -u origin feature/SKA-123-description</a:t>
+            </a:r>
+          </a:p>
+        </p:txBody>
+      </p:sp>
+      <p:sp>
+        <p:nvSpPr>
+          <p:cNvPr id="11" name="TextBox 10"/>
+          <p:cNvSpPr txBox="1"/>
+          <p:nvPr/>
+        </p:nvSpPr>
+        <p:spPr>
+          <a:xfrm>
+            <a:off x="365760" y="2944368"/>
+            <a:ext cx="4023360" cy="320040"/>
+          </a:xfrm>
+          <a:prstGeom prst="rect">
+            <a:avLst/>
+          </a:prstGeom>
+          <a:noFill/>
+        </p:spPr>
+        <p:txBody>
+          <a:bodyPr wrap="square">
+            <a:spAutoFit/>
+          </a:bodyPr>
+          <a:lstStyle/>
+          <a:p>
+            <a:pPr algn="l"/>
+            <a:r>
+              <a:rPr sz="900" b="0">
+                <a:solidFill>
+                  <a:srgbClr val="3C3C3C"/>
+                </a:solidFill>
+              </a:rPr>
+              <a:t>5.  gh pr create  (opens Pull Request)</a:t>
+            </a:r>
+          </a:p>
+        </p:txBody>
+      </p:sp>
+      <p:sp>
+        <p:nvSpPr>
+          <p:cNvPr id="12" name="TextBox 11"/>
+          <p:cNvSpPr txBox="1"/>
+          <p:nvPr/>
+        </p:nvSpPr>
+        <p:spPr>
+          <a:xfrm>
+            <a:off x="365760" y="3291839"/>
+            <a:ext cx="4023360" cy="320040"/>
+          </a:xfrm>
+          <a:prstGeom prst="rect">
+            <a:avLst/>
+          </a:prstGeom>
+          <a:noFill/>
+        </p:spPr>
+        <p:txBody>
+          <a:bodyPr wrap="square">
+            <a:spAutoFit/>
+          </a:bodyPr>
+          <a:lstStyle/>
+          <a:p>
+            <a:pPr algn="l"/>
+            <a:r>
+              <a:rPr sz="900" b="0">
+                <a:solidFill>
+                  <a:srgbClr val="3C3C3C"/>
+                </a:solidFill>
+              </a:rPr>
+              <a:t>6.  CI runs: Unit Tests + Package Lambda</a:t>
+            </a:r>
+          </a:p>
+        </p:txBody>
+      </p:sp>
+      <p:sp>
+        <p:nvSpPr>
+          <p:cNvPr id="13" name="TextBox 12"/>
+          <p:cNvSpPr txBox="1"/>
+          <p:nvPr/>
+        </p:nvSpPr>
+        <p:spPr>
+          <a:xfrm>
+            <a:off x="365760" y="3639311"/>
+            <a:ext cx="4023360" cy="320040"/>
+          </a:xfrm>
+          <a:prstGeom prst="rect">
+            <a:avLst/>
+          </a:prstGeom>
+          <a:noFill/>
+        </p:spPr>
+        <p:txBody>
+          <a:bodyPr wrap="square">
+            <a:spAutoFit/>
+          </a:bodyPr>
+          <a:lstStyle/>
+          <a:p>
+            <a:pPr algn="l"/>
+            <a:r>
+              <a:rPr sz="900" b="0">
+                <a:solidFill>
+                  <a:srgbClr val="3C3C3C"/>
+                </a:solidFill>
+              </a:rPr>
+              <a:t>7.  Reviewer approves PR</a:t>
+            </a:r>
+          </a:p>
+        </p:txBody>
+      </p:sp>
+      <p:sp>
+        <p:nvSpPr>
+          <p:cNvPr id="14" name="TextBox 13"/>
+          <p:cNvSpPr txBox="1"/>
+          <p:nvPr/>
+        </p:nvSpPr>
+        <p:spPr>
+          <a:xfrm>
+            <a:off x="365760" y="3986783"/>
+            <a:ext cx="4023360" cy="320040"/>
+          </a:xfrm>
+          <a:prstGeom prst="rect">
+            <a:avLst/>
+          </a:prstGeom>
+          <a:noFill/>
+        </p:spPr>
+        <p:txBody>
+          <a:bodyPr wrap="square">
+            <a:spAutoFit/>
+          </a:bodyPr>
+          <a:lstStyle/>
+          <a:p>
+            <a:pPr algn="l"/>
+            <a:r>
+              <a:rPr sz="900" b="0">
+                <a:solidFill>
+                  <a:srgbClr val="3C3C3C"/>
+                </a:solidFill>
+              </a:rPr>
+              <a:t>8.  Merge via GitHub UI (Squash and merge)</a:t>
+            </a:r>
+          </a:p>
+        </p:txBody>
+      </p:sp>
+      <p:sp>
+        <p:nvSpPr>
+          <p:cNvPr id="15" name="TextBox 14"/>
+          <p:cNvSpPr txBox="1"/>
+          <p:nvPr/>
+        </p:nvSpPr>
+        <p:spPr>
+          <a:xfrm>
+            <a:off x="365760" y="4334255"/>
+            <a:ext cx="4023360" cy="320040"/>
+          </a:xfrm>
+          <a:prstGeom prst="rect">
+            <a:avLst/>
+          </a:prstGeom>
+          <a:noFill/>
+        </p:spPr>
+        <p:txBody>
+          <a:bodyPr wrap="square">
+            <a:spAutoFit/>
+          </a:bodyPr>
+          <a:lstStyle/>
+          <a:p>
+            <a:pPr algn="l"/>
+            <a:r>
+              <a:rPr sz="900" b="0">
+                <a:solidFill>
+                  <a:srgbClr val="3C3C3C"/>
+                </a:solidFill>
+              </a:rPr>
+              <a:t>9.  Delete feature branch</a:t>
+            </a:r>
+          </a:p>
+        </p:txBody>
+      </p:sp>
+      <p:sp>
+        <p:nvSpPr>
+          <p:cNvPr id="16" name="TextBox 15"/>
+          <p:cNvSpPr txBox="1"/>
+          <p:nvPr/>
+        </p:nvSpPr>
+        <p:spPr>
+          <a:xfrm>
+            <a:off x="4663440" y="1143000"/>
+            <a:ext cx="4114800" cy="320040"/>
+          </a:xfrm>
+          <a:prstGeom prst="rect">
+            <a:avLst/>
+          </a:prstGeom>
+          <a:noFill/>
+        </p:spPr>
+        <p:txBody>
+          <a:bodyPr wrap="square">
+            <a:spAutoFit/>
+          </a:bodyPr>
+          <a:lstStyle/>
+          <a:p>
+            <a:pPr algn="l"/>
+            <a:r>
+              <a:rPr sz="1300" b="1">
+                <a:solidFill>
+                  <a:srgbClr val="3C3C3C"/>
+                </a:solidFill>
+              </a:rPr>
+              <a:t>Branch Naming Standards</a:t>
+            </a:r>
+          </a:p>
+        </p:txBody>
+      </p:sp>
+      <p:sp>
+        <p:nvSpPr>
+          <p:cNvPr id="17" name="Rectangle 16"/>
+          <p:cNvSpPr/>
+          <p:nvPr/>
+        </p:nvSpPr>
+        <p:spPr>
+          <a:xfrm>
+            <a:off x="4663440" y="1554480"/>
+            <a:ext cx="1005840" cy="292608"/>
+          </a:xfrm>
+          <a:prstGeom prst="rect">
+            <a:avLst/>
+          </a:prstGeom>
+          <a:solidFill>
+            <a:srgbClr val="EB1C24"/>
+          </a:solidFill>
+          <a:ln>
+            <a:noFill/>
+          </a:ln>
+        </p:spPr>
+        <p:style>
+          <a:lnRef idx="1">
+            <a:schemeClr val="accent1"/>
+          </a:lnRef>
+          <a:fillRef idx="3">
+            <a:schemeClr val="accent1"/>
+          </a:fillRef>
+          <a:effectRef idx="2">
+            <a:schemeClr val="accent1"/>
+          </a:effectRef>
+          <a:fontRef idx="minor">
+            <a:schemeClr val="lt1"/>
+          </a:fontRef>
+        </p:style>
+        <p:txBody>
+          <a:bodyPr rtlCol="0" anchor="ctr"/>
+          <a:lstStyle/>
+          <a:p>
+            <a:pPr algn="ctr"/>
+          </a:p>
+        </p:txBody>
+      </p:sp>
+      <p:sp>
+        <p:nvSpPr>
+          <p:cNvPr id="18" name="TextBox 17"/>
+          <p:cNvSpPr txBox="1"/>
+          <p:nvPr/>
+        </p:nvSpPr>
+        <p:spPr>
+          <a:xfrm>
+            <a:off x="4681728" y="1591056"/>
+            <a:ext cx="969264" cy="237744"/>
+          </a:xfrm>
+          <a:prstGeom prst="rect">
+            <a:avLst/>
+          </a:prstGeom>
+          <a:noFill/>
+        </p:spPr>
+        <p:txBody>
+          <a:bodyPr wrap="square">
+            <a:spAutoFit/>
+          </a:bodyPr>
+          <a:lstStyle/>
+          <a:p>
+            <a:pPr algn="l"/>
+            <a:r>
+              <a:rPr sz="900" b="1">
+                <a:solidFill>
+                  <a:srgbClr val="FFFFFF"/>
+                </a:solidFill>
+              </a:rPr>
+              <a:t>feature/</a:t>
+            </a:r>
+          </a:p>
+        </p:txBody>
+      </p:sp>
+      <p:sp>
+        <p:nvSpPr>
+          <p:cNvPr id="19" name="TextBox 18"/>
+          <p:cNvSpPr txBox="1"/>
+          <p:nvPr/>
+        </p:nvSpPr>
+        <p:spPr>
+          <a:xfrm>
+            <a:off x="5760720" y="1591056"/>
+            <a:ext cx="2560320" cy="256032"/>
+          </a:xfrm>
+          <a:prstGeom prst="rect">
+            <a:avLst/>
+          </a:prstGeom>
+          <a:noFill/>
+        </p:spPr>
+        <p:txBody>
+          <a:bodyPr wrap="square">
+            <a:spAutoFit/>
+          </a:bodyPr>
+          <a:lstStyle/>
+          <a:p>
+            <a:pPr algn="l"/>
+            <a:r>
+              <a:rPr sz="900" b="0">
+                <a:solidFill>
+                  <a:srgbClr val="3C3C3C"/>
+                </a:solidFill>
+              </a:rPr>
+              <a:t>feature/SKA-42-yahoo-parser</a:t>
+            </a:r>
+          </a:p>
+        </p:txBody>
+      </p:sp>
+      <p:sp>
+        <p:nvSpPr>
+          <p:cNvPr id="20" name="Rectangle 19"/>
+          <p:cNvSpPr/>
+          <p:nvPr/>
+        </p:nvSpPr>
+        <p:spPr>
+          <a:xfrm>
+            <a:off x="4663440" y="1938528"/>
+            <a:ext cx="1005840" cy="292608"/>
+          </a:xfrm>
+          <a:prstGeom prst="rect">
+            <a:avLst/>
+          </a:prstGeom>
+          <a:solidFill>
+            <a:srgbClr val="EB1C24"/>
+          </a:solidFill>
+          <a:ln>
+            <a:noFill/>
+          </a:ln>
+        </p:spPr>
+        <p:style>
+          <a:lnRef idx="1">
+            <a:schemeClr val="accent1"/>
+          </a:lnRef>
+          <a:fillRef idx="3">
+            <a:schemeClr val="accent1"/>
+          </a:fillRef>
+          <a:effectRef idx="2">
+            <a:schemeClr val="accent1"/>
+          </a:effectRef>
+          <a:fontRef idx="minor">
+            <a:schemeClr val="lt1"/>
+          </a:fontRef>
+        </p:style>
+        <p:txBody>
+          <a:bodyPr rtlCol="0" anchor="ctr"/>
+          <a:lstStyle/>
+          <a:p>
+            <a:pPr algn="ctr"/>
+          </a:p>
+        </p:txBody>
+      </p:sp>
+      <p:sp>
+        <p:nvSpPr>
+          <p:cNvPr id="21" name="TextBox 20"/>
+          <p:cNvSpPr txBox="1"/>
+          <p:nvPr/>
+        </p:nvSpPr>
+        <p:spPr>
+          <a:xfrm>
+            <a:off x="4681728" y="1975104"/>
+            <a:ext cx="969264" cy="237744"/>
+          </a:xfrm>
+          <a:prstGeom prst="rect">
+            <a:avLst/>
+          </a:prstGeom>
+          <a:noFill/>
+        </p:spPr>
+        <p:txBody>
+          <a:bodyPr wrap="square">
+            <a:spAutoFit/>
+          </a:bodyPr>
+          <a:lstStyle/>
+          <a:p>
+            <a:pPr algn="l"/>
+            <a:r>
+              <a:rPr sz="900" b="1">
+                <a:solidFill>
+                  <a:srgbClr val="FFFFFF"/>
+                </a:solidFill>
+              </a:rPr>
+              <a:t>fix/</a:t>
+            </a:r>
+          </a:p>
+        </p:txBody>
+      </p:sp>
+      <p:sp>
+        <p:nvSpPr>
+          <p:cNvPr id="22" name="TextBox 21"/>
+          <p:cNvSpPr txBox="1"/>
+          <p:nvPr/>
+        </p:nvSpPr>
+        <p:spPr>
+          <a:xfrm>
+            <a:off x="5760720" y="1975104"/>
+            <a:ext cx="2560320" cy="256032"/>
+          </a:xfrm>
+          <a:prstGeom prst="rect">
+            <a:avLst/>
+          </a:prstGeom>
+          <a:noFill/>
+        </p:spPr>
+        <p:txBody>
+          <a:bodyPr wrap="square">
+            <a:spAutoFit/>
+          </a:bodyPr>
+          <a:lstStyle/>
+          <a:p>
+            <a:pPr algn="l"/>
+            <a:r>
+              <a:rPr sz="900" b="0">
+                <a:solidFill>
+                  <a:srgbClr val="3C3C3C"/>
+                </a:solidFill>
+              </a:rPr>
+              <a:t>fix/SKA-55-revenue-rounding</a:t>
+            </a:r>
+          </a:p>
+        </p:txBody>
+      </p:sp>
+      <p:sp>
+        <p:nvSpPr>
+          <p:cNvPr id="23" name="Rectangle 22"/>
+          <p:cNvSpPr/>
+          <p:nvPr/>
+        </p:nvSpPr>
+        <p:spPr>
+          <a:xfrm>
+            <a:off x="4663440" y="2322576"/>
+            <a:ext cx="1005840" cy="292608"/>
+          </a:xfrm>
+          <a:prstGeom prst="rect">
+            <a:avLst/>
+          </a:prstGeom>
+          <a:solidFill>
+            <a:srgbClr val="EB1C24"/>
+          </a:solidFill>
+          <a:ln>
+            <a:noFill/>
+          </a:ln>
+        </p:spPr>
+        <p:style>
+          <a:lnRef idx="1">
+            <a:schemeClr val="accent1"/>
+          </a:lnRef>
+          <a:fillRef idx="3">
+            <a:schemeClr val="accent1"/>
+          </a:fillRef>
+          <a:effectRef idx="2">
+            <a:schemeClr val="accent1"/>
+          </a:effectRef>
+          <a:fontRef idx="minor">
+            <a:schemeClr val="lt1"/>
+          </a:fontRef>
+        </p:style>
+        <p:txBody>
+          <a:bodyPr rtlCol="0" anchor="ctr"/>
+          <a:lstStyle/>
+          <a:p>
+            <a:pPr algn="ctr"/>
+          </a:p>
+        </p:txBody>
+      </p:sp>
+      <p:sp>
+        <p:nvSpPr>
+          <p:cNvPr id="24" name="TextBox 23"/>
+          <p:cNvSpPr txBox="1"/>
+          <p:nvPr/>
+        </p:nvSpPr>
+        <p:spPr>
+          <a:xfrm>
+            <a:off x="4681728" y="2359152"/>
+            <a:ext cx="969264" cy="237744"/>
+          </a:xfrm>
+          <a:prstGeom prst="rect">
+            <a:avLst/>
+          </a:prstGeom>
+          <a:noFill/>
+        </p:spPr>
+        <p:txBody>
+          <a:bodyPr wrap="square">
+            <a:spAutoFit/>
+          </a:bodyPr>
+          <a:lstStyle/>
+          <a:p>
+            <a:pPr algn="l"/>
+            <a:r>
+              <a:rPr sz="900" b="1">
+                <a:solidFill>
+                  <a:srgbClr val="FFFFFF"/>
+                </a:solidFill>
+              </a:rPr>
+              <a:t>hotfix/</a:t>
+            </a:r>
+          </a:p>
+        </p:txBody>
+      </p:sp>
+      <p:sp>
+        <p:nvSpPr>
+          <p:cNvPr id="25" name="TextBox 24"/>
+          <p:cNvSpPr txBox="1"/>
+          <p:nvPr/>
+        </p:nvSpPr>
+        <p:spPr>
+          <a:xfrm>
+            <a:off x="5760720" y="2359152"/>
+            <a:ext cx="2560320" cy="256032"/>
+          </a:xfrm>
+          <a:prstGeom prst="rect">
+            <a:avLst/>
+          </a:prstGeom>
+          <a:noFill/>
+        </p:spPr>
+        <p:txBody>
+          <a:bodyPr wrap="square">
+            <a:spAutoFit/>
+          </a:bodyPr>
+          <a:lstStyle/>
+          <a:p>
+            <a:pPr algn="l"/>
+            <a:r>
+              <a:rPr sz="900" b="0">
+                <a:solidFill>
+                  <a:srgbClr val="3C3C3C"/>
+                </a:solidFill>
+              </a:rPr>
+              <a:t>hotfix/SKA-99-lambda-oom</a:t>
+            </a:r>
+          </a:p>
+        </p:txBody>
+      </p:sp>
+      <p:sp>
+        <p:nvSpPr>
+          <p:cNvPr id="26" name="Rectangle 25"/>
+          <p:cNvSpPr/>
+          <p:nvPr/>
+        </p:nvSpPr>
+        <p:spPr>
+          <a:xfrm>
+            <a:off x="4663440" y="2706624"/>
+            <a:ext cx="1005840" cy="292608"/>
+          </a:xfrm>
+          <a:prstGeom prst="rect">
+            <a:avLst/>
+          </a:prstGeom>
+          <a:solidFill>
+            <a:srgbClr val="EB1C24"/>
+          </a:solidFill>
+          <a:ln>
+            <a:noFill/>
+          </a:ln>
+        </p:spPr>
+        <p:style>
+          <a:lnRef idx="1">
+            <a:schemeClr val="accent1"/>
+          </a:lnRef>
+          <a:fillRef idx="3">
+            <a:schemeClr val="accent1"/>
+          </a:fillRef>
+          <a:effectRef idx="2">
+            <a:schemeClr val="accent1"/>
+          </a:effectRef>
+          <a:fontRef idx="minor">
+            <a:schemeClr val="lt1"/>
+          </a:fontRef>
+        </p:style>
+        <p:txBody>
+          <a:bodyPr rtlCol="0" anchor="ctr"/>
+          <a:lstStyle/>
+          <a:p>
+            <a:pPr algn="ctr"/>
+          </a:p>
+        </p:txBody>
+      </p:sp>
+      <p:sp>
+        <p:nvSpPr>
+          <p:cNvPr id="27" name="TextBox 26"/>
+          <p:cNvSpPr txBox="1"/>
+          <p:nvPr/>
+        </p:nvSpPr>
+        <p:spPr>
+          <a:xfrm>
+            <a:off x="4681728" y="2743200"/>
+            <a:ext cx="969264" cy="237744"/>
+          </a:xfrm>
+          <a:prstGeom prst="rect">
+            <a:avLst/>
+          </a:prstGeom>
+          <a:noFill/>
+        </p:spPr>
+        <p:txBody>
+          <a:bodyPr wrap="square">
+            <a:spAutoFit/>
+          </a:bodyPr>
+          <a:lstStyle/>
+          <a:p>
+            <a:pPr algn="l"/>
+            <a:r>
+              <a:rPr sz="900" b="1">
+                <a:solidFill>
+                  <a:srgbClr val="FFFFFF"/>
+                </a:solidFill>
+              </a:rPr>
+              <a:t>release/</a:t>
+            </a:r>
+          </a:p>
+        </p:txBody>
+      </p:sp>
+      <p:sp>
+        <p:nvSpPr>
+          <p:cNvPr id="28" name="TextBox 27"/>
+          <p:cNvSpPr txBox="1"/>
+          <p:nvPr/>
+        </p:nvSpPr>
+        <p:spPr>
+          <a:xfrm>
+            <a:off x="5760720" y="2743200"/>
+            <a:ext cx="2560320" cy="256032"/>
+          </a:xfrm>
+          <a:prstGeom prst="rect">
+            <a:avLst/>
+          </a:prstGeom>
+          <a:noFill/>
+        </p:spPr>
+        <p:txBody>
+          <a:bodyPr wrap="square">
+            <a:spAutoFit/>
+          </a:bodyPr>
+          <a:lstStyle/>
+          <a:p>
+            <a:pPr algn="l"/>
+            <a:r>
+              <a:rPr sz="900" b="0">
+                <a:solidFill>
+                  <a:srgbClr val="3C3C3C"/>
+                </a:solidFill>
+              </a:rPr>
+              <a:t>release/1.2.0</a:t>
+            </a:r>
+          </a:p>
+        </p:txBody>
+      </p:sp>
+      <p:sp>
+        <p:nvSpPr>
+          <p:cNvPr id="29" name="Rectangle 28"/>
+          <p:cNvSpPr/>
+          <p:nvPr/>
+        </p:nvSpPr>
+        <p:spPr>
+          <a:xfrm>
+            <a:off x="4663440" y="3090672"/>
+            <a:ext cx="1005840" cy="292608"/>
+          </a:xfrm>
+          <a:prstGeom prst="rect">
+            <a:avLst/>
+          </a:prstGeom>
+          <a:solidFill>
+            <a:srgbClr val="EB1C24"/>
+          </a:solidFill>
+          <a:ln>
+            <a:noFill/>
+          </a:ln>
+        </p:spPr>
+        <p:style>
+          <a:lnRef idx="1">
+            <a:schemeClr val="accent1"/>
+          </a:lnRef>
+          <a:fillRef idx="3">
+            <a:schemeClr val="accent1"/>
+          </a:fillRef>
+          <a:effectRef idx="2">
+            <a:schemeClr val="accent1"/>
+          </a:effectRef>
+          <a:fontRef idx="minor">
+            <a:schemeClr val="lt1"/>
+          </a:fontRef>
+        </p:style>
+        <p:txBody>
+          <a:bodyPr rtlCol="0" anchor="ctr"/>
+          <a:lstStyle/>
+          <a:p>
+            <a:pPr algn="ctr"/>
+          </a:p>
+        </p:txBody>
+      </p:sp>
+      <p:sp>
+        <p:nvSpPr>
+          <p:cNvPr id="30" name="TextBox 29"/>
+          <p:cNvSpPr txBox="1"/>
+          <p:nvPr/>
+        </p:nvSpPr>
+        <p:spPr>
+          <a:xfrm>
+            <a:off x="4681728" y="3127248"/>
+            <a:ext cx="969264" cy="237744"/>
+          </a:xfrm>
+          <a:prstGeom prst="rect">
+            <a:avLst/>
+          </a:prstGeom>
+          <a:noFill/>
+        </p:spPr>
+        <p:txBody>
+          <a:bodyPr wrap="square">
+            <a:spAutoFit/>
+          </a:bodyPr>
+          <a:lstStyle/>
+          <a:p>
+            <a:pPr algn="l"/>
+            <a:r>
+              <a:rPr sz="900" b="1">
+                <a:solidFill>
+                  <a:srgbClr val="FFFFFF"/>
+                </a:solidFill>
+              </a:rPr>
+              <a:t>chore/</a:t>
+            </a:r>
+          </a:p>
+        </p:txBody>
+      </p:sp>
+      <p:sp>
+        <p:nvSpPr>
+          <p:cNvPr id="31" name="TextBox 30"/>
+          <p:cNvSpPr txBox="1"/>
+          <p:nvPr/>
+        </p:nvSpPr>
+        <p:spPr>
+          <a:xfrm>
+            <a:off x="5760720" y="3127248"/>
+            <a:ext cx="2560320" cy="256032"/>
+          </a:xfrm>
+          <a:prstGeom prst="rect">
+            <a:avLst/>
+          </a:prstGeom>
+          <a:noFill/>
+        </p:spPr>
+        <p:txBody>
+          <a:bodyPr wrap="square">
+            <a:spAutoFit/>
+          </a:bodyPr>
+          <a:lstStyle/>
+          <a:p>
+            <a:pPr algn="l"/>
+            <a:r>
+              <a:rPr sz="900" b="0">
+                <a:solidFill>
+                  <a:srgbClr val="3C3C3C"/>
+                </a:solidFill>
+              </a:rPr>
+              <a:t>chore/update-dependencies</a:t>
+            </a:r>
+          </a:p>
+        </p:txBody>
+      </p:sp>
+      <p:sp>
+        <p:nvSpPr>
+          <p:cNvPr id="32" name="TextBox 31"/>
+          <p:cNvSpPr txBox="1"/>
+          <p:nvPr/>
+        </p:nvSpPr>
+        <p:spPr>
+          <a:xfrm>
+            <a:off x="4663440" y="3657600"/>
+            <a:ext cx="4114800" cy="320040"/>
+          </a:xfrm>
+          <a:prstGeom prst="rect">
+            <a:avLst/>
+          </a:prstGeom>
+          <a:noFill/>
+        </p:spPr>
+        <p:txBody>
+          <a:bodyPr wrap="square">
+            <a:spAutoFit/>
+          </a:bodyPr>
+          <a:lstStyle/>
+          <a:p>
+            <a:pPr algn="l"/>
+            <a:r>
+              <a:rPr sz="1100" b="1">
+                <a:solidFill>
+                  <a:srgbClr val="3C3C3C"/>
+                </a:solidFill>
+              </a:rPr>
+              <a:t>Commit Format (Conventional Commits)</a:t>
+            </a:r>
+          </a:p>
+        </p:txBody>
+      </p:sp>
+      <p:sp>
+        <p:nvSpPr>
+          <p:cNvPr id="33" name="TextBox 32"/>
+          <p:cNvSpPr txBox="1"/>
+          <p:nvPr/>
+        </p:nvSpPr>
+        <p:spPr>
+          <a:xfrm>
+            <a:off x="4663440" y="4023360"/>
+            <a:ext cx="4114800" cy="731520"/>
+          </a:xfrm>
+          <a:prstGeom prst="rect">
+            <a:avLst/>
+          </a:prstGeom>
+          <a:noFill/>
+        </p:spPr>
+        <p:txBody>
+          <a:bodyPr wrap="square">
+            <a:spAutoFit/>
+          </a:bodyPr>
+          <a:lstStyle/>
+          <a:p>
+            <a:pPr algn="l"/>
+            <a:r>
+              <a:rPr sz="900" b="0">
+                <a:solidFill>
+                  <a:srgbClr val="3C3C3C"/>
+                </a:solidFill>
+              </a:rPr>
+              <a:t>feat(scope): description
+fix(scope): description
+docs / test / refactor / ci / chore</a:t>
+            </a:r>
+          </a:p>
+        </p:txBody>
+      </p:sp>
+      <p:sp>
+        <p:nvSpPr>
+          <p:cNvPr id="34" name="Rectangle 33"/>
+          <p:cNvSpPr/>
+          <p:nvPr/>
+        </p:nvSpPr>
+        <p:spPr>
+          <a:xfrm>
+            <a:off x="274320" y="4937760"/>
+            <a:ext cx="8595360" cy="1097280"/>
+          </a:xfrm>
+          <a:prstGeom prst="rect">
+            <a:avLst/>
+          </a:prstGeom>
+          <a:solidFill>
+            <a:srgbClr val="F4F4F4"/>
+          </a:solidFill>
+          <a:ln>
+            <a:solidFill>
+              <a:srgbClr val="3C3C3C"/>
+            </a:solidFill>
+          </a:ln>
+        </p:spPr>
+        <p:style>
+          <a:lnRef idx="1">
+            <a:schemeClr val="accent1"/>
+          </a:lnRef>
+          <a:fillRef idx="3">
+            <a:schemeClr val="accent1"/>
+          </a:fillRef>
+          <a:effectRef idx="2">
+            <a:schemeClr val="accent1"/>
+          </a:effectRef>
+          <a:fontRef idx="minor">
+            <a:schemeClr val="lt1"/>
+          </a:fontRef>
+        </p:style>
+        <p:txBody>
+          <a:bodyPr rtlCol="0" anchor="ctr"/>
+          <a:lstStyle/>
+          <a:p>
+            <a:pPr algn="ctr"/>
+          </a:p>
+        </p:txBody>
+      </p:sp>
+      <p:sp>
+        <p:nvSpPr>
+          <p:cNvPr id="35" name="TextBox 34"/>
+          <p:cNvSpPr txBox="1"/>
+          <p:nvPr/>
+        </p:nvSpPr>
+        <p:spPr>
+          <a:xfrm>
+            <a:off x="457200" y="4983480"/>
+            <a:ext cx="4572000" cy="320040"/>
+          </a:xfrm>
+          <a:prstGeom prst="rect">
+            <a:avLst/>
+          </a:prstGeom>
+          <a:noFill/>
+        </p:spPr>
+        <p:txBody>
+          <a:bodyPr wrap="square">
+            <a:spAutoFit/>
+          </a:bodyPr>
+          <a:lstStyle/>
+          <a:p>
+            <a:pPr algn="l"/>
+            <a:r>
+              <a:rPr sz="1100" b="1">
+                <a:solidFill>
+                  <a:srgbClr val="EB1C24"/>
+                </a:solidFill>
+              </a:rPr>
+              <a:t>Branch Protection Rules — main</a:t>
+            </a:r>
+          </a:p>
+        </p:txBody>
+      </p:sp>
+      <p:sp>
+        <p:nvSpPr>
+          <p:cNvPr id="36" name="TextBox 35"/>
+          <p:cNvSpPr txBox="1"/>
+          <p:nvPr/>
+        </p:nvSpPr>
+        <p:spPr>
+          <a:xfrm>
+            <a:off x="457200" y="5349240"/>
+            <a:ext cx="8229600" cy="640080"/>
+          </a:xfrm>
+          <a:prstGeom prst="rect">
+            <a:avLst/>
+          </a:prstGeom>
+          <a:noFill/>
+        </p:spPr>
+        <p:txBody>
+          <a:bodyPr wrap="square">
+            <a:spAutoFit/>
+          </a:bodyPr>
+          <a:lstStyle/>
+          <a:p>
+            <a:pPr algn="l"/>
+            <a:r>
+              <a:rPr sz="900" b="0">
+                <a:solidFill>
+                  <a:srgbClr val="3C3C3C"/>
+                </a:solidFill>
+              </a:rPr>
+              <a:t>✓  Direct push to main blocked     ✓  1 PR approval required
+✓  Unit Tests must pass             ✓  Package Lambda must pass
+✓  Force push disabled              ✓  Branch deletion disabled</a:t>
+            </a:r>
+          </a:p>
+        </p:txBody>
+      </p:sp>
+    </p:spTree>
+  </p:cSld>
+  <p:clrMapOvr>
+    <a:masterClrMapping/>
+  </p:clrMapOvr>
+</p:sld>
+</file>
+
+<file path=ppt/slides/slide16.xml><?xml version="1.0" encoding="utf-8"?>
+<p:sld xmlns:a="http://schemas.openxmlformats.org/drawingml/2006/main" xmlns:p="http://schemas.openxmlformats.org/presentationml/2006/main" xmlns:r="http://schemas.openxmlformats.org/officeDocument/2006/relationships">
+  <p:cSld>
+    <p:spTree>
+      <p:nvGrpSpPr>
+        <p:cNvPr id="1" name=""/>
+        <p:cNvGrpSpPr/>
+        <p:nvPr/>
+      </p:nvGrpSpPr>
+      <p:grpSpPr/>
+      <p:sp>
+        <p:nvSpPr>
+          <p:cNvPr id="2" name="Rectangle 1"/>
+          <p:cNvSpPr/>
+          <p:nvPr/>
+        </p:nvSpPr>
+        <p:spPr>
+          <a:xfrm>
+            <a:off x="0" y="0"/>
+            <a:ext cx="9144000" cy="1005840"/>
+          </a:xfrm>
+          <a:prstGeom prst="rect">
+            <a:avLst/>
+          </a:prstGeom>
+          <a:solidFill>
+            <a:srgbClr val="EB1C24"/>
+          </a:solidFill>
+          <a:ln>
+            <a:noFill/>
+          </a:ln>
+        </p:spPr>
+        <p:style>
+          <a:lnRef idx="1">
+            <a:schemeClr val="accent1"/>
+          </a:lnRef>
+          <a:fillRef idx="3">
+            <a:schemeClr val="accent1"/>
+          </a:fillRef>
+          <a:effectRef idx="2">
+            <a:schemeClr val="accent1"/>
+          </a:effectRef>
+          <a:fontRef idx="minor">
+            <a:schemeClr val="lt1"/>
+          </a:fontRef>
+        </p:style>
+        <p:txBody>
+          <a:bodyPr rtlCol="0" anchor="ctr"/>
+          <a:lstStyle/>
+          <a:p>
+            <a:pPr algn="ctr"/>
+          </a:p>
+        </p:txBody>
+      </p:sp>
+      <p:sp>
+        <p:nvSpPr>
+          <p:cNvPr id="3" name="TextBox 2"/>
+          <p:cNvSpPr txBox="1"/>
+          <p:nvPr/>
+        </p:nvSpPr>
+        <p:spPr>
+          <a:xfrm>
+            <a:off x="274320" y="182880"/>
+            <a:ext cx="8595360" cy="731520"/>
+          </a:xfrm>
+          <a:prstGeom prst="rect">
+            <a:avLst/>
+          </a:prstGeom>
+          <a:noFill/>
+        </p:spPr>
+        <p:txBody>
+          <a:bodyPr wrap="square">
+            <a:spAutoFit/>
+          </a:bodyPr>
+          <a:lstStyle/>
+          <a:p>
+            <a:pPr algn="l"/>
+            <a:r>
+              <a:rPr sz="2400" b="1">
+                <a:solidFill>
+                  <a:srgbClr val="FFFFFF"/>
+                </a:solidFill>
+              </a:rPr>
+              <a:t>Scalability — Handling 10 GB+ Files</a:t>
+            </a:r>
+          </a:p>
+        </p:txBody>
+      </p:sp>
+      <p:sp>
+        <p:nvSpPr>
+          <p:cNvPr id="4" name="Rectangle 3"/>
+          <p:cNvSpPr/>
+          <p:nvPr/>
+        </p:nvSpPr>
+        <p:spPr>
+          <a:xfrm>
+            <a:off x="0" y="6309360"/>
+            <a:ext cx="9144000" cy="548640"/>
+          </a:xfrm>
+          <a:prstGeom prst="rect">
+            <a:avLst/>
+          </a:prstGeom>
+          <a:solidFill>
+            <a:srgbClr val="3C3C3C"/>
+          </a:solidFill>
+          <a:ln>
+            <a:noFill/>
+          </a:ln>
+        </p:spPr>
+        <p:style>
+          <a:lnRef idx="1">
+            <a:schemeClr val="accent1"/>
+          </a:lnRef>
+          <a:fillRef idx="3">
+            <a:schemeClr val="accent1"/>
+          </a:fillRef>
+          <a:effectRef idx="2">
+            <a:schemeClr val="accent1"/>
+          </a:effectRef>
+          <a:fontRef idx="minor">
+            <a:schemeClr val="lt1"/>
+          </a:fontRef>
+        </p:style>
+        <p:txBody>
+          <a:bodyPr rtlCol="0" anchor="ctr"/>
+          <a:lstStyle/>
+          <a:p>
+            <a:pPr algn="ctr"/>
+          </a:p>
+        </p:txBody>
+      </p:sp>
+      <p:sp>
+        <p:nvSpPr>
+          <p:cNvPr id="5" name="TextBox 4"/>
+          <p:cNvSpPr txBox="1"/>
+          <p:nvPr/>
+        </p:nvSpPr>
+        <p:spPr>
+          <a:xfrm>
+            <a:off x="274320" y="6355080"/>
+            <a:ext cx="8595360" cy="365760"/>
+          </a:xfrm>
+          <a:prstGeom prst="rect">
+            <a:avLst/>
+          </a:prstGeom>
+          <a:noFill/>
+        </p:spPr>
+        <p:txBody>
+          <a:bodyPr wrap="square">
+            <a:spAutoFit/>
+          </a:bodyPr>
+          <a:lstStyle/>
+          <a:p>
+            <a:pPr algn="ctr"/>
+            <a:r>
+              <a:rPr sz="900" b="0">
+                <a:solidFill>
+                  <a:srgbClr val="FFFFFF"/>
+                </a:solidFill>
+              </a:rPr>
+              <a:t>Adobe Data Engineer Assessment  |  Search Keyword Performance Analyzer  |  Scalability</a:t>
+            </a:r>
+          </a:p>
+        </p:txBody>
+      </p:sp>
+      <p:sp>
+        <p:nvSpPr>
+          <p:cNvPr id="6" name="TextBox 5"/>
+          <p:cNvSpPr txBox="1"/>
+          <p:nvPr/>
+        </p:nvSpPr>
+        <p:spPr>
+          <a:xfrm>
+            <a:off x="274320" y="1097280"/>
+            <a:ext cx="8595360" cy="594360"/>
+          </a:xfrm>
+          <a:prstGeom prst="rect">
+            <a:avLst/>
+          </a:prstGeom>
+          <a:noFill/>
+        </p:spPr>
+        <p:txBody>
+          <a:bodyPr wrap="square">
+            <a:spAutoFit/>
+          </a:bodyPr>
+          <a:lstStyle/>
+          <a:p>
+            <a:pPr algn="l"/>
+            <a:r>
+              <a:rPr sz="1000" b="0">
+                <a:solidFill>
+                  <a:srgbClr val="3C3C3C"/>
+                </a:solidFill>
+              </a:rPr>
+              <a:t>Current design streams the file row by row (csv.DictReader) — memory usage is O(unique visitors), not O(file size). This handles moderate files efficiently but has limits at 10 GB+ scale.</a:t>
+            </a:r>
+          </a:p>
+        </p:txBody>
+      </p:sp>
+      <p:sp>
+        <p:nvSpPr>
+          <p:cNvPr id="7" name="Rectangle 6"/>
+          <p:cNvSpPr/>
+          <p:nvPr/>
+        </p:nvSpPr>
+        <p:spPr>
+          <a:xfrm>
+            <a:off x="274320" y="1828800"/>
+            <a:ext cx="1645920" cy="320040"/>
+          </a:xfrm>
+          <a:prstGeom prst="rect">
+            <a:avLst/>
+          </a:prstGeom>
+          <a:solidFill>
+            <a:srgbClr val="3C3C3C"/>
+          </a:solidFill>
+          <a:ln>
+            <a:noFill/>
+          </a:ln>
+        </p:spPr>
+        <p:style>
+          <a:lnRef idx="1">
+            <a:schemeClr val="accent1"/>
+          </a:lnRef>
+          <a:fillRef idx="3">
+            <a:schemeClr val="accent1"/>
+          </a:fillRef>
+          <a:effectRef idx="2">
+            <a:schemeClr val="accent1"/>
+          </a:effectRef>
+          <a:fontRef idx="minor">
+            <a:schemeClr val="lt1"/>
+          </a:fontRef>
+        </p:style>
+        <p:txBody>
+          <a:bodyPr rtlCol="0" anchor="ctr"/>
+          <a:lstStyle/>
+          <a:p>
+            <a:pPr algn="ctr"/>
+          </a:p>
+        </p:txBody>
+      </p:sp>
+      <p:sp>
+        <p:nvSpPr>
+          <p:cNvPr id="8" name="TextBox 7"/>
+          <p:cNvSpPr txBox="1"/>
+          <p:nvPr/>
+        </p:nvSpPr>
+        <p:spPr>
+          <a:xfrm>
+            <a:off x="320040" y="1856231"/>
+            <a:ext cx="1554480" cy="274320"/>
+          </a:xfrm>
+          <a:prstGeom prst="rect">
+            <a:avLst/>
+          </a:prstGeom>
+          <a:noFill/>
+        </p:spPr>
+        <p:txBody>
+          <a:bodyPr wrap="square">
+            <a:spAutoFit/>
+          </a:bodyPr>
+          <a:lstStyle/>
+          <a:p>
+            <a:pPr algn="l"/>
+            <a:r>
+              <a:rPr sz="900" b="1">
+                <a:solidFill>
+                  <a:srgbClr val="FFFFFF"/>
+                </a:solidFill>
+              </a:rPr>
+              <a:t>Approach</a:t>
+            </a:r>
+          </a:p>
+        </p:txBody>
+      </p:sp>
+      <p:sp>
+        <p:nvSpPr>
+          <p:cNvPr id="9" name="Rectangle 8"/>
+          <p:cNvSpPr/>
+          <p:nvPr/>
+        </p:nvSpPr>
+        <p:spPr>
+          <a:xfrm>
+            <a:off x="1920240" y="1828800"/>
+            <a:ext cx="1097280" cy="320040"/>
+          </a:xfrm>
+          <a:prstGeom prst="rect">
+            <a:avLst/>
+          </a:prstGeom>
+          <a:solidFill>
+            <a:srgbClr val="3C3C3C"/>
+          </a:solidFill>
+          <a:ln>
+            <a:noFill/>
+          </a:ln>
+        </p:spPr>
+        <p:style>
+          <a:lnRef idx="1">
+            <a:schemeClr val="accent1"/>
+          </a:lnRef>
+          <a:fillRef idx="3">
+            <a:schemeClr val="accent1"/>
+          </a:fillRef>
+          <a:effectRef idx="2">
+            <a:schemeClr val="accent1"/>
+          </a:effectRef>
+          <a:fontRef idx="minor">
+            <a:schemeClr val="lt1"/>
+          </a:fontRef>
+        </p:style>
+        <p:txBody>
+          <a:bodyPr rtlCol="0" anchor="ctr"/>
+          <a:lstStyle/>
+          <a:p>
+            <a:pPr algn="ctr"/>
+          </a:p>
+        </p:txBody>
+      </p:sp>
+      <p:sp>
+        <p:nvSpPr>
+          <p:cNvPr id="10" name="TextBox 9"/>
+          <p:cNvSpPr txBox="1"/>
+          <p:nvPr/>
+        </p:nvSpPr>
+        <p:spPr>
+          <a:xfrm>
+            <a:off x="1965960" y="1856231"/>
+            <a:ext cx="1005839" cy="274320"/>
+          </a:xfrm>
+          <a:prstGeom prst="rect">
+            <a:avLst/>
+          </a:prstGeom>
+          <a:noFill/>
+        </p:spPr>
+        <p:txBody>
+          <a:bodyPr wrap="square">
+            <a:spAutoFit/>
+          </a:bodyPr>
+          <a:lstStyle/>
+          <a:p>
+            <a:pPr algn="l"/>
+            <a:r>
+              <a:rPr sz="900" b="1">
+                <a:solidFill>
+                  <a:srgbClr val="FFFFFF"/>
+                </a:solidFill>
+              </a:rPr>
+              <a:t>File Size</a:t>
+            </a:r>
+          </a:p>
+        </p:txBody>
+      </p:sp>
+      <p:sp>
+        <p:nvSpPr>
+          <p:cNvPr id="11" name="Rectangle 10"/>
+          <p:cNvSpPr/>
+          <p:nvPr/>
+        </p:nvSpPr>
+        <p:spPr>
+          <a:xfrm>
+            <a:off x="3017520" y="1828800"/>
+            <a:ext cx="3840480" cy="320040"/>
+          </a:xfrm>
+          <a:prstGeom prst="rect">
+            <a:avLst/>
+          </a:prstGeom>
+          <a:solidFill>
+            <a:srgbClr val="3C3C3C"/>
+          </a:solidFill>
+          <a:ln>
+            <a:noFill/>
+          </a:ln>
+        </p:spPr>
+        <p:style>
+          <a:lnRef idx="1">
+            <a:schemeClr val="accent1"/>
+          </a:lnRef>
+          <a:fillRef idx="3">
+            <a:schemeClr val="accent1"/>
+          </a:fillRef>
+          <a:effectRef idx="2">
+            <a:schemeClr val="accent1"/>
+          </a:effectRef>
+          <a:fontRef idx="minor">
+            <a:schemeClr val="lt1"/>
+          </a:fontRef>
+        </p:style>
+        <p:txBody>
+          <a:bodyPr rtlCol="0" anchor="ctr"/>
+          <a:lstStyle/>
+          <a:p>
+            <a:pPr algn="ctr"/>
+          </a:p>
+        </p:txBody>
+      </p:sp>
+      <p:sp>
+        <p:nvSpPr>
+          <p:cNvPr id="12" name="TextBox 11"/>
+          <p:cNvSpPr txBox="1"/>
+          <p:nvPr/>
+        </p:nvSpPr>
+        <p:spPr>
+          <a:xfrm>
+            <a:off x="3063239" y="1856231"/>
+            <a:ext cx="3749040" cy="274320"/>
+          </a:xfrm>
+          <a:prstGeom prst="rect">
+            <a:avLst/>
+          </a:prstGeom>
+          <a:noFill/>
+        </p:spPr>
+        <p:txBody>
+          <a:bodyPr wrap="square">
+            <a:spAutoFit/>
+          </a:bodyPr>
+          <a:lstStyle/>
+          <a:p>
+            <a:pPr algn="l"/>
+            <a:r>
+              <a:rPr sz="900" b="1">
+                <a:solidFill>
+                  <a:srgbClr val="FFFFFF"/>
+                </a:solidFill>
+              </a:rPr>
+              <a:t>How</a:t>
+            </a:r>
+          </a:p>
+        </p:txBody>
+      </p:sp>
+      <p:sp>
+        <p:nvSpPr>
+          <p:cNvPr id="13" name="Rectangle 12"/>
+          <p:cNvSpPr/>
+          <p:nvPr/>
+        </p:nvSpPr>
+        <p:spPr>
+          <a:xfrm>
+            <a:off x="6858000" y="1828800"/>
+            <a:ext cx="1645920" cy="320040"/>
+          </a:xfrm>
+          <a:prstGeom prst="rect">
+            <a:avLst/>
+          </a:prstGeom>
+          <a:solidFill>
+            <a:srgbClr val="3C3C3C"/>
+          </a:solidFill>
+          <a:ln>
+            <a:noFill/>
+          </a:ln>
+        </p:spPr>
+        <p:style>
+          <a:lnRef idx="1">
+            <a:schemeClr val="accent1"/>
+          </a:lnRef>
+          <a:fillRef idx="3">
+            <a:schemeClr val="accent1"/>
+          </a:fillRef>
+          <a:effectRef idx="2">
+            <a:schemeClr val="accent1"/>
+          </a:effectRef>
+          <a:fontRef idx="minor">
+            <a:schemeClr val="lt1"/>
+          </a:fontRef>
+        </p:style>
+        <p:txBody>
+          <a:bodyPr rtlCol="0" anchor="ctr"/>
+          <a:lstStyle/>
+          <a:p>
+            <a:pPr algn="ctr"/>
+          </a:p>
+        </p:txBody>
+      </p:sp>
+      <p:sp>
+        <p:nvSpPr>
+          <p:cNvPr id="14" name="TextBox 13"/>
+          <p:cNvSpPr txBox="1"/>
+          <p:nvPr/>
+        </p:nvSpPr>
+        <p:spPr>
+          <a:xfrm>
+            <a:off x="6903720" y="1856231"/>
+            <a:ext cx="1554480" cy="274320"/>
+          </a:xfrm>
+          <a:prstGeom prst="rect">
+            <a:avLst/>
+          </a:prstGeom>
+          <a:noFill/>
+        </p:spPr>
+        <p:txBody>
+          <a:bodyPr wrap="square">
+            <a:spAutoFit/>
+          </a:bodyPr>
+          <a:lstStyle/>
+          <a:p>
+            <a:pPr algn="l"/>
+            <a:r>
+              <a:rPr sz="900" b="1">
+                <a:solidFill>
+                  <a:srgbClr val="FFFFFF"/>
+                </a:solidFill>
+              </a:rPr>
+              <a:t>AWS Service</a:t>
+            </a:r>
+          </a:p>
+        </p:txBody>
+      </p:sp>
+      <p:sp>
+        <p:nvSpPr>
+          <p:cNvPr id="15" name="Rectangle 14"/>
+          <p:cNvSpPr/>
+          <p:nvPr/>
+        </p:nvSpPr>
+        <p:spPr>
+          <a:xfrm>
+            <a:off x="274320" y="2240280"/>
+            <a:ext cx="8595360" cy="411480"/>
+          </a:xfrm>
+          <a:prstGeom prst="rect">
+            <a:avLst/>
+          </a:prstGeom>
+          <a:solidFill>
+            <a:srgbClr val="F4F4F4"/>
+          </a:solidFill>
+          <a:ln>
+            <a:noFill/>
+          </a:ln>
+        </p:spPr>
+        <p:style>
+          <a:lnRef idx="1">
+            <a:schemeClr val="accent1"/>
+          </a:lnRef>
+          <a:fillRef idx="3">
+            <a:schemeClr val="accent1"/>
+          </a:fillRef>
+          <a:effectRef idx="2">
+            <a:schemeClr val="accent1"/>
+          </a:effectRef>
+          <a:fontRef idx="minor">
+            <a:schemeClr val="lt1"/>
+          </a:fontRef>
+        </p:style>
+        <p:txBody>
+          <a:bodyPr rtlCol="0" anchor="ctr"/>
+          <a:lstStyle/>
+          <a:p>
+            <a:pPr algn="ctr"/>
+          </a:p>
+        </p:txBody>
+      </p:sp>
+      <p:sp>
+        <p:nvSpPr>
+          <p:cNvPr id="16" name="TextBox 15"/>
+          <p:cNvSpPr txBox="1"/>
+          <p:nvPr/>
+        </p:nvSpPr>
+        <p:spPr>
+          <a:xfrm>
+            <a:off x="320040" y="2295144"/>
+            <a:ext cx="1554480" cy="320040"/>
+          </a:xfrm>
+          <a:prstGeom prst="rect">
+            <a:avLst/>
+          </a:prstGeom>
+          <a:noFill/>
+        </p:spPr>
+        <p:txBody>
+          <a:bodyPr wrap="square">
+            <a:spAutoFit/>
+          </a:bodyPr>
+          <a:lstStyle/>
+          <a:p>
+            <a:pPr algn="l"/>
+            <a:r>
+              <a:rPr sz="900" b="0">
+                <a:solidFill>
+                  <a:srgbClr val="3C3C3C"/>
+                </a:solidFill>
+              </a:rPr>
+              <a:t>Chunked multiprocessing</a:t>
+            </a:r>
+          </a:p>
+        </p:txBody>
+      </p:sp>
+      <p:sp>
+        <p:nvSpPr>
+          <p:cNvPr id="17" name="TextBox 16"/>
+          <p:cNvSpPr txBox="1"/>
+          <p:nvPr/>
+        </p:nvSpPr>
+        <p:spPr>
+          <a:xfrm>
+            <a:off x="1965960" y="2295144"/>
+            <a:ext cx="1005839" cy="320040"/>
+          </a:xfrm>
+          <a:prstGeom prst="rect">
+            <a:avLst/>
+          </a:prstGeom>
+          <a:noFill/>
+        </p:spPr>
+        <p:txBody>
+          <a:bodyPr wrap="square">
+            <a:spAutoFit/>
+          </a:bodyPr>
+          <a:lstStyle/>
+          <a:p>
+            <a:pPr algn="l"/>
+            <a:r>
+              <a:rPr sz="900" b="0">
+                <a:solidFill>
+                  <a:srgbClr val="3C3C3C"/>
+                </a:solidFill>
+              </a:rPr>
+              <a:t>10–50 GB</a:t>
+            </a:r>
+          </a:p>
+        </p:txBody>
+      </p:sp>
+      <p:sp>
+        <p:nvSpPr>
+          <p:cNvPr id="18" name="TextBox 17"/>
+          <p:cNvSpPr txBox="1"/>
+          <p:nvPr/>
+        </p:nvSpPr>
+        <p:spPr>
+          <a:xfrm>
+            <a:off x="3063239" y="2295144"/>
+            <a:ext cx="3749040" cy="320040"/>
+          </a:xfrm>
+          <a:prstGeom prst="rect">
+            <a:avLst/>
+          </a:prstGeom>
+          <a:noFill/>
+        </p:spPr>
+        <p:txBody>
+          <a:bodyPr wrap="square">
+            <a:spAutoFit/>
+          </a:bodyPr>
+          <a:lstStyle/>
+          <a:p>
+            <a:pPr algn="l"/>
+            <a:r>
+              <a:rPr sz="900" b="0">
+                <a:solidFill>
+                  <a:srgbClr val="3C3C3C"/>
+                </a:solidFill>
+              </a:rPr>
+              <a:t>Split file into N chunks, process in parallel, merge results</a:t>
+            </a:r>
+          </a:p>
+        </p:txBody>
+      </p:sp>
+      <p:sp>
+        <p:nvSpPr>
+          <p:cNvPr id="19" name="TextBox 18"/>
+          <p:cNvSpPr txBox="1"/>
+          <p:nvPr/>
+        </p:nvSpPr>
+        <p:spPr>
+          <a:xfrm>
+            <a:off x="6903720" y="2295144"/>
+            <a:ext cx="1554480" cy="320040"/>
+          </a:xfrm>
+          <a:prstGeom prst="rect">
+            <a:avLst/>
+          </a:prstGeom>
+          <a:noFill/>
+        </p:spPr>
+        <p:txBody>
+          <a:bodyPr wrap="square">
+            <a:spAutoFit/>
+          </a:bodyPr>
+          <a:lstStyle/>
+          <a:p>
+            <a:pPr algn="l"/>
+            <a:r>
+              <a:rPr sz="900" b="0">
+                <a:solidFill>
+                  <a:srgbClr val="3C3C3C"/>
+                </a:solidFill>
+              </a:rPr>
+              <a:t>EC2 / Lambda</a:t>
+            </a:r>
+          </a:p>
+        </p:txBody>
+      </p:sp>
+      <p:sp>
+        <p:nvSpPr>
+          <p:cNvPr id="20" name="Rectangle 19"/>
+          <p:cNvSpPr/>
+          <p:nvPr/>
+        </p:nvSpPr>
+        <p:spPr>
+          <a:xfrm>
+            <a:off x="274320" y="2679192"/>
+            <a:ext cx="8595360" cy="411480"/>
+          </a:xfrm>
+          <a:prstGeom prst="rect">
+            <a:avLst/>
+          </a:prstGeom>
+          <a:solidFill>
+            <a:srgbClr val="FFFFFF"/>
+          </a:solidFill>
+          <a:ln>
+            <a:noFill/>
+          </a:ln>
+        </p:spPr>
+        <p:style>
+          <a:lnRef idx="1">
+            <a:schemeClr val="accent1"/>
+          </a:lnRef>
+          <a:fillRef idx="3">
+            <a:schemeClr val="accent1"/>
+          </a:fillRef>
+          <a:effectRef idx="2">
+            <a:schemeClr val="accent1"/>
+          </a:effectRef>
+          <a:fontRef idx="minor">
+            <a:schemeClr val="lt1"/>
+          </a:fontRef>
+        </p:style>
+        <p:txBody>
+          <a:bodyPr rtlCol="0" anchor="ctr"/>
+          <a:lstStyle/>
+          <a:p>
+            <a:pPr algn="ctr"/>
+          </a:p>
+        </p:txBody>
+      </p:sp>
+      <p:sp>
+        <p:nvSpPr>
+          <p:cNvPr id="21" name="TextBox 20"/>
+          <p:cNvSpPr txBox="1"/>
+          <p:nvPr/>
+        </p:nvSpPr>
+        <p:spPr>
+          <a:xfrm>
+            <a:off x="320040" y="2734056"/>
+            <a:ext cx="1554480" cy="320040"/>
+          </a:xfrm>
+          <a:prstGeom prst="rect">
+            <a:avLst/>
+          </a:prstGeom>
+          <a:noFill/>
+        </p:spPr>
+        <p:txBody>
+          <a:bodyPr wrap="square">
+            <a:spAutoFit/>
+          </a:bodyPr>
+          <a:lstStyle/>
+          <a:p>
+            <a:pPr algn="l"/>
+            <a:r>
+              <a:rPr sz="900" b="0">
+                <a:solidFill>
+                  <a:srgbClr val="3C3C3C"/>
+                </a:solidFill>
+              </a:rPr>
+              <a:t>AWS Glue (PySpark)</a:t>
+            </a:r>
+          </a:p>
+        </p:txBody>
+      </p:sp>
+      <p:sp>
+        <p:nvSpPr>
+          <p:cNvPr id="22" name="TextBox 21"/>
+          <p:cNvSpPr txBox="1"/>
+          <p:nvPr/>
+        </p:nvSpPr>
+        <p:spPr>
+          <a:xfrm>
+            <a:off x="1965960" y="2734056"/>
+            <a:ext cx="1005839" cy="320040"/>
+          </a:xfrm>
+          <a:prstGeom prst="rect">
+            <a:avLst/>
+          </a:prstGeom>
+          <a:noFill/>
+        </p:spPr>
+        <p:txBody>
+          <a:bodyPr wrap="square">
+            <a:spAutoFit/>
+          </a:bodyPr>
+          <a:lstStyle/>
+          <a:p>
+            <a:pPr algn="l"/>
+            <a:r>
+              <a:rPr sz="900" b="0">
+                <a:solidFill>
+                  <a:srgbClr val="3C3C3C"/>
+                </a:solidFill>
+              </a:rPr>
+              <a:t>50+ GB</a:t>
+            </a:r>
+          </a:p>
+        </p:txBody>
+      </p:sp>
+      <p:sp>
+        <p:nvSpPr>
+          <p:cNvPr id="23" name="TextBox 22"/>
+          <p:cNvSpPr txBox="1"/>
+          <p:nvPr/>
+        </p:nvSpPr>
+        <p:spPr>
+          <a:xfrm>
+            <a:off x="3063239" y="2734056"/>
+            <a:ext cx="3749040" cy="320040"/>
+          </a:xfrm>
+          <a:prstGeom prst="rect">
+            <a:avLst/>
+          </a:prstGeom>
+          <a:noFill/>
+        </p:spPr>
+        <p:txBody>
+          <a:bodyPr wrap="square">
+            <a:spAutoFit/>
+          </a:bodyPr>
+          <a:lstStyle/>
+          <a:p>
+            <a:pPr algn="l"/>
+            <a:r>
+              <a:rPr sz="900" b="0">
+                <a:solidFill>
+                  <a:srgbClr val="3C3C3C"/>
+                </a:solidFill>
+              </a:rPr>
+              <a:t>Serverless managed Spark. Reads from S3, partitioned automatically</a:t>
+            </a:r>
+          </a:p>
+        </p:txBody>
+      </p:sp>
+      <p:sp>
+        <p:nvSpPr>
+          <p:cNvPr id="24" name="TextBox 23"/>
+          <p:cNvSpPr txBox="1"/>
+          <p:nvPr/>
+        </p:nvSpPr>
+        <p:spPr>
+          <a:xfrm>
+            <a:off x="6903720" y="2734056"/>
+            <a:ext cx="1554480" cy="320040"/>
+          </a:xfrm>
+          <a:prstGeom prst="rect">
+            <a:avLst/>
+          </a:prstGeom>
+          <a:noFill/>
+        </p:spPr>
+        <p:txBody>
+          <a:bodyPr wrap="square">
+            <a:spAutoFit/>
+          </a:bodyPr>
+          <a:lstStyle/>
+          <a:p>
+            <a:pPr algn="l"/>
+            <a:r>
+              <a:rPr sz="900" b="0">
+                <a:solidFill>
+                  <a:srgbClr val="3C3C3C"/>
+                </a:solidFill>
+              </a:rPr>
+              <a:t>Glue</a:t>
+            </a:r>
+          </a:p>
+        </p:txBody>
+      </p:sp>
+      <p:sp>
+        <p:nvSpPr>
+          <p:cNvPr id="25" name="Rectangle 24"/>
+          <p:cNvSpPr/>
+          <p:nvPr/>
+        </p:nvSpPr>
+        <p:spPr>
+          <a:xfrm>
+            <a:off x="274320" y="3118104"/>
+            <a:ext cx="8595360" cy="411480"/>
+          </a:xfrm>
+          <a:prstGeom prst="rect">
+            <a:avLst/>
+          </a:prstGeom>
+          <a:solidFill>
+            <a:srgbClr val="F4F4F4"/>
+          </a:solidFill>
+          <a:ln>
+            <a:noFill/>
+          </a:ln>
+        </p:spPr>
+        <p:style>
+          <a:lnRef idx="1">
+            <a:schemeClr val="accent1"/>
+          </a:lnRef>
+          <a:fillRef idx="3">
+            <a:schemeClr val="accent1"/>
+          </a:fillRef>
+          <a:effectRef idx="2">
+            <a:schemeClr val="accent1"/>
+          </a:effectRef>
+          <a:fontRef idx="minor">
+            <a:schemeClr val="lt1"/>
+          </a:fontRef>
+        </p:style>
+        <p:txBody>
+          <a:bodyPr rtlCol="0" anchor="ctr"/>
+          <a:lstStyle/>
+          <a:p>
+            <a:pPr algn="ctr"/>
+          </a:p>
+        </p:txBody>
+      </p:sp>
+      <p:sp>
+        <p:nvSpPr>
+          <p:cNvPr id="26" name="TextBox 25"/>
+          <p:cNvSpPr txBox="1"/>
+          <p:nvPr/>
+        </p:nvSpPr>
+        <p:spPr>
+          <a:xfrm>
+            <a:off x="320040" y="3172968"/>
+            <a:ext cx="1554480" cy="320040"/>
+          </a:xfrm>
+          <a:prstGeom prst="rect">
+            <a:avLst/>
+          </a:prstGeom>
+          <a:noFill/>
+        </p:spPr>
+        <p:txBody>
+          <a:bodyPr wrap="square">
+            <a:spAutoFit/>
+          </a:bodyPr>
+          <a:lstStyle/>
+          <a:p>
+            <a:pPr algn="l"/>
+            <a:r>
+              <a:rPr sz="900" b="0">
+                <a:solidFill>
+                  <a:srgbClr val="3C3C3C"/>
+                </a:solidFill>
+              </a:rPr>
+              <a:t>Amazon EMR</a:t>
+            </a:r>
+          </a:p>
+        </p:txBody>
+      </p:sp>
+      <p:sp>
+        <p:nvSpPr>
+          <p:cNvPr id="27" name="TextBox 26"/>
+          <p:cNvSpPr txBox="1"/>
+          <p:nvPr/>
+        </p:nvSpPr>
+        <p:spPr>
+          <a:xfrm>
+            <a:off x="1965960" y="3172968"/>
+            <a:ext cx="1005839" cy="320040"/>
+          </a:xfrm>
+          <a:prstGeom prst="rect">
+            <a:avLst/>
+          </a:prstGeom>
+          <a:noFill/>
+        </p:spPr>
+        <p:txBody>
+          <a:bodyPr wrap="square">
+            <a:spAutoFit/>
+          </a:bodyPr>
+          <a:lstStyle/>
+          <a:p>
+            <a:pPr algn="l"/>
+            <a:r>
+              <a:rPr sz="900" b="0">
+                <a:solidFill>
+                  <a:srgbClr val="3C3C3C"/>
+                </a:solidFill>
+              </a:rPr>
+              <a:t>100+ GB</a:t>
+            </a:r>
+          </a:p>
+        </p:txBody>
+      </p:sp>
+      <p:sp>
+        <p:nvSpPr>
+          <p:cNvPr id="28" name="TextBox 27"/>
+          <p:cNvSpPr txBox="1"/>
+          <p:nvPr/>
+        </p:nvSpPr>
+        <p:spPr>
+          <a:xfrm>
+            <a:off x="3063239" y="3172968"/>
+            <a:ext cx="3749040" cy="320040"/>
+          </a:xfrm>
+          <a:prstGeom prst="rect">
+            <a:avLst/>
+          </a:prstGeom>
+          <a:noFill/>
+        </p:spPr>
+        <p:txBody>
+          <a:bodyPr wrap="square">
+            <a:spAutoFit/>
+          </a:bodyPr>
+          <a:lstStyle/>
+          <a:p>
+            <a:pPr algn="l"/>
+            <a:r>
+              <a:rPr sz="900" b="0">
+                <a:solidFill>
+                  <a:srgbClr val="3C3C3C"/>
+                </a:solidFill>
+              </a:rPr>
+              <a:t>Full Spark cluster. Maximum control, optimal for recurring large jobs</a:t>
+            </a:r>
+          </a:p>
+        </p:txBody>
+      </p:sp>
+      <p:sp>
+        <p:nvSpPr>
+          <p:cNvPr id="29" name="TextBox 28"/>
+          <p:cNvSpPr txBox="1"/>
+          <p:nvPr/>
+        </p:nvSpPr>
+        <p:spPr>
+          <a:xfrm>
+            <a:off x="6903720" y="3172968"/>
+            <a:ext cx="1554480" cy="320040"/>
+          </a:xfrm>
+          <a:prstGeom prst="rect">
+            <a:avLst/>
+          </a:prstGeom>
+          <a:noFill/>
+        </p:spPr>
+        <p:txBody>
+          <a:bodyPr wrap="square">
+            <a:spAutoFit/>
+          </a:bodyPr>
+          <a:lstStyle/>
+          <a:p>
+            <a:pPr algn="l"/>
+            <a:r>
+              <a:rPr sz="900" b="0">
+                <a:solidFill>
+                  <a:srgbClr val="3C3C3C"/>
+                </a:solidFill>
+              </a:rPr>
+              <a:t>EMR</a:t>
+            </a:r>
+          </a:p>
+        </p:txBody>
+      </p:sp>
+      <p:sp>
+        <p:nvSpPr>
+          <p:cNvPr id="30" name="Rectangle 29"/>
+          <p:cNvSpPr/>
+          <p:nvPr/>
+        </p:nvSpPr>
+        <p:spPr>
+          <a:xfrm>
+            <a:off x="274320" y="3557016"/>
+            <a:ext cx="8595360" cy="411480"/>
+          </a:xfrm>
+          <a:prstGeom prst="rect">
+            <a:avLst/>
+          </a:prstGeom>
+          <a:solidFill>
+            <a:srgbClr val="FFFFFF"/>
+          </a:solidFill>
+          <a:ln>
+            <a:noFill/>
+          </a:ln>
+        </p:spPr>
+        <p:style>
+          <a:lnRef idx="1">
+            <a:schemeClr val="accent1"/>
+          </a:lnRef>
+          <a:fillRef idx="3">
+            <a:schemeClr val="accent1"/>
+          </a:fillRef>
+          <a:effectRef idx="2">
+            <a:schemeClr val="accent1"/>
+          </a:effectRef>
+          <a:fontRef idx="minor">
+            <a:schemeClr val="lt1"/>
+          </a:fontRef>
+        </p:style>
+        <p:txBody>
+          <a:bodyPr rtlCol="0" anchor="ctr"/>
+          <a:lstStyle/>
+          <a:p>
+            <a:pPr algn="ctr"/>
+          </a:p>
+        </p:txBody>
+      </p:sp>
+      <p:sp>
+        <p:nvSpPr>
+          <p:cNvPr id="31" name="TextBox 30"/>
+          <p:cNvSpPr txBox="1"/>
+          <p:nvPr/>
+        </p:nvSpPr>
+        <p:spPr>
+          <a:xfrm>
+            <a:off x="320040" y="3611880"/>
+            <a:ext cx="1554480" cy="320040"/>
+          </a:xfrm>
+          <a:prstGeom prst="rect">
+            <a:avLst/>
+          </a:prstGeom>
+          <a:noFill/>
+        </p:spPr>
+        <p:txBody>
+          <a:bodyPr wrap="square">
+            <a:spAutoFit/>
+          </a:bodyPr>
+          <a:lstStyle/>
+          <a:p>
+            <a:pPr algn="l"/>
+            <a:r>
+              <a:rPr sz="900" b="0">
+                <a:solidFill>
+                  <a:srgbClr val="3C3C3C"/>
+                </a:solidFill>
+              </a:rPr>
+              <a:t>Kinesis Streams</a:t>
+            </a:r>
+          </a:p>
+        </p:txBody>
+      </p:sp>
+      <p:sp>
+        <p:nvSpPr>
+          <p:cNvPr id="32" name="TextBox 31"/>
+          <p:cNvSpPr txBox="1"/>
+          <p:nvPr/>
+        </p:nvSpPr>
+        <p:spPr>
+          <a:xfrm>
+            <a:off x="1965960" y="3611880"/>
+            <a:ext cx="1005839" cy="320040"/>
+          </a:xfrm>
+          <a:prstGeom prst="rect">
+            <a:avLst/>
+          </a:prstGeom>
+          <a:noFill/>
+        </p:spPr>
+        <p:txBody>
+          <a:bodyPr wrap="square">
+            <a:spAutoFit/>
+          </a:bodyPr>
+          <a:lstStyle/>
+          <a:p>
+            <a:pPr algn="l"/>
+            <a:r>
+              <a:rPr sz="900" b="0">
+                <a:solidFill>
+                  <a:srgbClr val="3C3C3C"/>
+                </a:solidFill>
+              </a:rPr>
+              <a:t>Real-time</a:t>
+            </a:r>
+          </a:p>
+        </p:txBody>
+      </p:sp>
+      <p:sp>
+        <p:nvSpPr>
+          <p:cNvPr id="33" name="TextBox 32"/>
+          <p:cNvSpPr txBox="1"/>
+          <p:nvPr/>
+        </p:nvSpPr>
+        <p:spPr>
+          <a:xfrm>
+            <a:off x="3063239" y="3611880"/>
+            <a:ext cx="3749040" cy="320040"/>
+          </a:xfrm>
+          <a:prstGeom prst="rect">
+            <a:avLst/>
+          </a:prstGeom>
+          <a:noFill/>
+        </p:spPr>
+        <p:txBody>
+          <a:bodyPr wrap="square">
+            <a:spAutoFit/>
+          </a:bodyPr>
+          <a:lstStyle/>
+          <a:p>
+            <a:pPr algn="l"/>
+            <a:r>
+              <a:rPr sz="900" b="0">
+                <a:solidFill>
+                  <a:srgbClr val="3C3C3C"/>
+                </a:solidFill>
+              </a:rPr>
+              <a:t>Process each hit as it arrives. No batch window — sub-second latency</a:t>
+            </a:r>
+          </a:p>
+        </p:txBody>
+      </p:sp>
+      <p:sp>
+        <p:nvSpPr>
+          <p:cNvPr id="34" name="TextBox 33"/>
+          <p:cNvSpPr txBox="1"/>
+          <p:nvPr/>
+        </p:nvSpPr>
+        <p:spPr>
+          <a:xfrm>
+            <a:off x="6903720" y="3611880"/>
+            <a:ext cx="1554480" cy="320040"/>
+          </a:xfrm>
+          <a:prstGeom prst="rect">
+            <a:avLst/>
+          </a:prstGeom>
+          <a:noFill/>
+        </p:spPr>
+        <p:txBody>
+          <a:bodyPr wrap="square">
+            <a:spAutoFit/>
+          </a:bodyPr>
+          <a:lstStyle/>
+          <a:p>
+            <a:pPr algn="l"/>
+            <a:r>
+              <a:rPr sz="900" b="0">
+                <a:solidFill>
+                  <a:srgbClr val="3C3C3C"/>
+                </a:solidFill>
+              </a:rPr>
+              <a:t>Kinesis</a:t>
+            </a:r>
+          </a:p>
+        </p:txBody>
+      </p:sp>
+      <p:sp>
+        <p:nvSpPr>
+          <p:cNvPr id="35" name="TextBox 34"/>
+          <p:cNvSpPr txBox="1"/>
+          <p:nvPr/>
+        </p:nvSpPr>
+        <p:spPr>
+          <a:xfrm>
+            <a:off x="274320" y="4297680"/>
+            <a:ext cx="4572000" cy="320040"/>
+          </a:xfrm>
+          <a:prstGeom prst="rect">
+            <a:avLst/>
+          </a:prstGeom>
+          <a:noFill/>
+        </p:spPr>
+        <p:txBody>
+          <a:bodyPr wrap="square">
+            <a:spAutoFit/>
+          </a:bodyPr>
+          <a:lstStyle/>
+          <a:p>
+            <a:pPr algn="l"/>
+            <a:r>
+              <a:rPr sz="1100" b="1">
+                <a:solidFill>
+                  <a:srgbClr val="EB1C24"/>
+                </a:solidFill>
+              </a:rPr>
+              <a:t>Current Bottlenecks at Scale</a:t>
+            </a:r>
+          </a:p>
+        </p:txBody>
+      </p:sp>
+      <p:sp>
+        <p:nvSpPr>
+          <p:cNvPr id="36" name="TextBox 35"/>
+          <p:cNvSpPr txBox="1"/>
+          <p:nvPr/>
+        </p:nvSpPr>
+        <p:spPr>
+          <a:xfrm>
+            <a:off x="365760" y="4663440"/>
+            <a:ext cx="8229600" cy="292608"/>
+          </a:xfrm>
+          <a:prstGeom prst="rect">
+            <a:avLst/>
+          </a:prstGeom>
+          <a:noFill/>
+        </p:spPr>
+        <p:txBody>
+          <a:bodyPr wrap="square">
+            <a:spAutoFit/>
+          </a:bodyPr>
+          <a:lstStyle/>
+          <a:p>
+            <a:pPr algn="l"/>
+            <a:r>
+              <a:rPr sz="900" b="0">
+                <a:solidFill>
+                  <a:srgbClr val="3C3C3C"/>
+                </a:solidFill>
+              </a:rPr>
+              <a:t>•  Single-threaded processing — one core for entire file</a:t>
+            </a:r>
+          </a:p>
+        </p:txBody>
+      </p:sp>
+      <p:sp>
+        <p:nvSpPr>
+          <p:cNvPr id="37" name="TextBox 36"/>
+          <p:cNvSpPr txBox="1"/>
+          <p:nvPr/>
+        </p:nvSpPr>
+        <p:spPr>
+          <a:xfrm>
+            <a:off x="365760" y="4983479"/>
+            <a:ext cx="8229600" cy="292608"/>
+          </a:xfrm>
+          <a:prstGeom prst="rect">
+            <a:avLst/>
+          </a:prstGeom>
+          <a:noFill/>
+        </p:spPr>
+        <p:txBody>
+          <a:bodyPr wrap="square">
+            <a:spAutoFit/>
+          </a:bodyPr>
+          <a:lstStyle/>
+          <a:p>
+            <a:pPr algn="l"/>
+            <a:r>
+              <a:rPr sz="900" b="0">
+                <a:solidFill>
+                  <a:srgbClr val="3C3C3C"/>
+                </a:solidFill>
+              </a:rPr>
+              <a:t>•  In-memory visitor map — grows with unique IPs (millions at scale)</a:t>
+            </a:r>
+          </a:p>
+        </p:txBody>
+      </p:sp>
+      <p:sp>
+        <p:nvSpPr>
+          <p:cNvPr id="38" name="TextBox 37"/>
+          <p:cNvSpPr txBox="1"/>
+          <p:nvPr/>
+        </p:nvSpPr>
+        <p:spPr>
+          <a:xfrm>
+            <a:off x="365760" y="5303519"/>
+            <a:ext cx="8229600" cy="292608"/>
+          </a:xfrm>
+          <a:prstGeom prst="rect">
+            <a:avLst/>
+          </a:prstGeom>
+          <a:noFill/>
+        </p:spPr>
+        <p:txBody>
+          <a:bodyPr wrap="square">
+            <a:spAutoFit/>
+          </a:bodyPr>
+          <a:lstStyle/>
+          <a:p>
+            <a:pPr algn="l"/>
+            <a:r>
+              <a:rPr sz="900" b="0">
+                <a:solidFill>
+                  <a:srgbClr val="3C3C3C"/>
+                </a:solidFill>
+              </a:rPr>
+              <a:t>•  Lambda limits — 15-min timeout, 10 GB /tmp storage</a:t>
+            </a:r>
+          </a:p>
+        </p:txBody>
+      </p:sp>
+      <p:sp>
+        <p:nvSpPr>
+          <p:cNvPr id="39" name="TextBox 38"/>
+          <p:cNvSpPr txBox="1"/>
+          <p:nvPr/>
+        </p:nvSpPr>
+        <p:spPr>
+          <a:xfrm>
+            <a:off x="365760" y="5623559"/>
+            <a:ext cx="8229600" cy="292608"/>
+          </a:xfrm>
+          <a:prstGeom prst="rect">
+            <a:avLst/>
+          </a:prstGeom>
+          <a:noFill/>
+        </p:spPr>
+        <p:txBody>
+          <a:bodyPr wrap="square">
+            <a:spAutoFit/>
+          </a:bodyPr>
+          <a:lstStyle/>
+          <a:p>
+            <a:pPr algn="l"/>
+            <a:r>
+              <a:rPr sz="900" b="0">
+                <a:solidFill>
+                  <a:srgbClr val="3C3C3C"/>
+                </a:solidFill>
+              </a:rPr>
+              <a:t>•  Single-file input — no native partitioning or parallelism</a:t>
+            </a:r>
+          </a:p>
+        </p:txBody>
+      </p:sp>
+    </p:spTree>
+  </p:cSld>
+  <p:clrMapOvr>
+    <a:masterClrMapping/>
+  </p:clrMapOvr>
+</p:sld>
+</file>
+
 <file path=ppt/slides/slide2.xml><?xml version="1.0" encoding="utf-8"?>
 <p:sld xmlns:a="http://schemas.openxmlformats.org/drawingml/2006/main" xmlns:r="http://schemas.openxmlformats.org/officeDocument/2006/relationships" xmlns:p="http://schemas.openxmlformats.org/presentationml/2006/main">
   <p:cSld name="Slide 2">
